--- a/docs/ThreadLine_Pitch_Deck.pptx
+++ b/docs/ThreadLine_Pitch_Deck.pptx
@@ -8,8 +8,9 @@
     <p:sldId id="256" r:id="rId2"/>
     <p:sldId id="257" r:id="rId3"/>
     <p:sldId id="258" r:id="rId4"/>
-    <p:sldId id="259" r:id="rId5"/>
-    <p:sldId id="260" r:id="rId6"/>
+    <p:sldId id="263" r:id="rId5"/>
+    <p:sldId id="259" r:id="rId6"/>
+    <p:sldId id="262" r:id="rId7"/>
   </p:sldIdLst>
   <p:sldSz cx="12192000" cy="6858000"/>
   <p:notesSz cx="6858000" cy="9144000"/>
@@ -306,7 +307,7 @@
           <a:p>
             <a:fld id="{5BCAD085-E8A6-8845-BD4E-CB4CCA059FC4}" type="datetimeFigureOut">
               <a:rPr lang="en-US" smtClean="0"/>
-              <a:t>8/12/26</a:t>
+              <a:t>8/16/26</a:t>
             </a:fld>
             <a:endParaRPr lang="en-US"/>
           </a:p>
@@ -474,7 +475,7 @@
           <a:p>
             <a:fld id="{5BCAD085-E8A6-8845-BD4E-CB4CCA059FC4}" type="datetimeFigureOut">
               <a:rPr lang="en-US" smtClean="0"/>
-              <a:t>8/12/26</a:t>
+              <a:t>8/16/26</a:t>
             </a:fld>
             <a:endParaRPr lang="en-US"/>
           </a:p>
@@ -652,7 +653,7 @@
           <a:p>
             <a:fld id="{5BCAD085-E8A6-8845-BD4E-CB4CCA059FC4}" type="datetimeFigureOut">
               <a:rPr lang="en-US" smtClean="0"/>
-              <a:t>8/12/26</a:t>
+              <a:t>8/16/26</a:t>
             </a:fld>
             <a:endParaRPr lang="en-US"/>
           </a:p>
@@ -820,7 +821,7 @@
           <a:p>
             <a:fld id="{5BCAD085-E8A6-8845-BD4E-CB4CCA059FC4}" type="datetimeFigureOut">
               <a:rPr lang="en-US" smtClean="0"/>
-              <a:t>8/12/26</a:t>
+              <a:t>8/16/26</a:t>
             </a:fld>
             <a:endParaRPr lang="en-US"/>
           </a:p>
@@ -1065,7 +1066,7 @@
           <a:p>
             <a:fld id="{5BCAD085-E8A6-8845-BD4E-CB4CCA059FC4}" type="datetimeFigureOut">
               <a:rPr lang="en-US" smtClean="0"/>
-              <a:t>8/12/26</a:t>
+              <a:t>8/16/26</a:t>
             </a:fld>
             <a:endParaRPr lang="en-US"/>
           </a:p>
@@ -1350,7 +1351,7 @@
           <a:p>
             <a:fld id="{5BCAD085-E8A6-8845-BD4E-CB4CCA059FC4}" type="datetimeFigureOut">
               <a:rPr lang="en-US" smtClean="0"/>
-              <a:t>8/12/26</a:t>
+              <a:t>8/16/26</a:t>
             </a:fld>
             <a:endParaRPr lang="en-US"/>
           </a:p>
@@ -1769,7 +1770,7 @@
           <a:p>
             <a:fld id="{5BCAD085-E8A6-8845-BD4E-CB4CCA059FC4}" type="datetimeFigureOut">
               <a:rPr lang="en-US" smtClean="0"/>
-              <a:t>8/12/26</a:t>
+              <a:t>8/16/26</a:t>
             </a:fld>
             <a:endParaRPr lang="en-US"/>
           </a:p>
@@ -1886,7 +1887,7 @@
           <a:p>
             <a:fld id="{5BCAD085-E8A6-8845-BD4E-CB4CCA059FC4}" type="datetimeFigureOut">
               <a:rPr lang="en-US" smtClean="0"/>
-              <a:t>8/12/26</a:t>
+              <a:t>8/16/26</a:t>
             </a:fld>
             <a:endParaRPr lang="en-US"/>
           </a:p>
@@ -1981,7 +1982,7 @@
           <a:p>
             <a:fld id="{5BCAD085-E8A6-8845-BD4E-CB4CCA059FC4}" type="datetimeFigureOut">
               <a:rPr lang="en-US" smtClean="0"/>
-              <a:t>8/12/26</a:t>
+              <a:t>8/16/26</a:t>
             </a:fld>
             <a:endParaRPr lang="en-US"/>
           </a:p>
@@ -2256,7 +2257,7 @@
           <a:p>
             <a:fld id="{5BCAD085-E8A6-8845-BD4E-CB4CCA059FC4}" type="datetimeFigureOut">
               <a:rPr lang="en-US" smtClean="0"/>
-              <a:t>8/12/26</a:t>
+              <a:t>8/16/26</a:t>
             </a:fld>
             <a:endParaRPr lang="en-US"/>
           </a:p>
@@ -2508,7 +2509,7 @@
           <a:p>
             <a:fld id="{5BCAD085-E8A6-8845-BD4E-CB4CCA059FC4}" type="datetimeFigureOut">
               <a:rPr lang="en-US" smtClean="0"/>
-              <a:t>8/12/26</a:t>
+              <a:t>8/16/26</a:t>
             </a:fld>
             <a:endParaRPr lang="en-US"/>
           </a:p>
@@ -2719,7 +2720,7 @@
           <a:p>
             <a:fld id="{5BCAD085-E8A6-8845-BD4E-CB4CCA059FC4}" type="datetimeFigureOut">
               <a:rPr lang="en-US" smtClean="0"/>
-              <a:t>8/12/26</a:t>
+              <a:t>8/16/26</a:t>
             </a:fld>
             <a:endParaRPr lang="en-US"/>
           </a:p>
@@ -3082,9 +3083,20 @@
   <p:cSld>
     <p:bg>
       <p:bgPr>
-        <a:solidFill>
-          <a:srgbClr val="FFFFFF"/>
-        </a:solidFill>
+        <a:gradFill rotWithShape="1">
+          <a:gsLst>
+            <a:gs pos="0">
+              <a:srgbClr val="FFFFFF"/>
+            </a:gs>
+            <a:gs pos="55000">
+              <a:srgbClr val="F6F7FE"/>
+            </a:gs>
+            <a:gs pos="100000">
+              <a:srgbClr val="E8EBFC"/>
+            </a:gs>
+          </a:gsLst>
+          <a:lin ang="2700000" scaled="0"/>
+        </a:gradFill>
         <a:effectLst/>
       </p:bgPr>
     </p:bg>
@@ -3104,104 +3116,107 @@
       </p:grpSpPr>
       <p:sp>
         <p:nvSpPr>
-          <p:cNvPr id="2" name="Rectangle 1"/>
+          <p:cNvPr id="30" name="Accent Blob 1"/>
           <p:cNvSpPr/>
           <p:nvPr/>
         </p:nvSpPr>
         <p:spPr>
           <a:xfrm>
-            <a:off x="0" y="0"/>
-            <a:ext cx="4206240" cy="6858000"/>
-          </a:xfrm>
-          <a:prstGeom prst="rect">
+            <a:off x="9550000" y="-1250000"/>
+            <a:ext cx="4200000" cy="4200000"/>
+          </a:xfrm>
+          <a:prstGeom prst="ellipse">
             <a:avLst/>
           </a:prstGeom>
           <a:solidFill>
-            <a:srgbClr val="FF5A5F"/>
+            <a:srgbClr val="6B7BF7">
+              <a:alpha val="10000"/>
+            </a:srgbClr>
           </a:solidFill>
           <a:ln>
             <a:noFill/>
           </a:ln>
-          <a:effectLst/>
-        </p:spPr>
-        <p:style>
-          <a:lnRef idx="1">
-            <a:schemeClr val="accent1"/>
-          </a:lnRef>
-          <a:fillRef idx="3">
-            <a:schemeClr val="accent1"/>
-          </a:fillRef>
-          <a:effectRef idx="2">
-            <a:schemeClr val="accent1"/>
-          </a:effectRef>
-          <a:fontRef idx="minor">
-            <a:schemeClr val="lt1"/>
-          </a:fontRef>
-        </p:style>
-        <p:txBody>
-          <a:bodyPr rtlCol="0" anchor="ctr"/>
-          <a:lstStyle/>
-          <a:p>
-            <a:pPr algn="ctr"/>
-            <a:endParaRPr/>
-          </a:p>
-        </p:txBody>
-      </p:sp>
-      <p:sp>
-        <p:nvSpPr>
-          <p:cNvPr id="3" name="Rectangle 2"/>
+        </p:spPr>
+        <p:txBody>
+          <a:bodyPr/>
+          <a:lstStyle/>
+          <a:p>
+            <a:endParaRPr lang="en-US"/>
+          </a:p>
+        </p:txBody>
+      </p:sp>
+      <p:sp>
+        <p:nvSpPr>
+          <p:cNvPr id="31" name="Accent Blob 2"/>
           <p:cNvSpPr/>
           <p:nvPr/>
         </p:nvSpPr>
         <p:spPr>
           <a:xfrm>
-            <a:off x="640080" y="640080"/>
-            <a:ext cx="502920" cy="502920"/>
-          </a:xfrm>
-          <a:prstGeom prst="rect">
+            <a:off x="-1400000" y="4300000"/>
+            <a:ext cx="3600000" cy="3600000"/>
+          </a:xfrm>
+          <a:prstGeom prst="ellipse">
             <a:avLst/>
           </a:prstGeom>
           <a:solidFill>
-            <a:srgbClr val="FFFFFF"/>
+            <a:srgbClr val="6B7BF7">
+              <a:alpha val="8000"/>
+            </a:srgbClr>
           </a:solidFill>
           <a:ln>
             <a:noFill/>
           </a:ln>
-          <a:effectLst/>
-        </p:spPr>
-        <p:style>
-          <a:lnRef idx="1">
-            <a:schemeClr val="accent1"/>
-          </a:lnRef>
-          <a:fillRef idx="3">
-            <a:schemeClr val="accent1"/>
-          </a:fillRef>
-          <a:effectRef idx="2">
-            <a:schemeClr val="accent1"/>
-          </a:effectRef>
-          <a:fontRef idx="minor">
-            <a:schemeClr val="lt1"/>
-          </a:fontRef>
-        </p:style>
-        <p:txBody>
-          <a:bodyPr rtlCol="0" anchor="ctr"/>
-          <a:lstStyle/>
-          <a:p>
-            <a:pPr algn="ctr"/>
-            <a:endParaRPr/>
-          </a:p>
-        </p:txBody>
-      </p:sp>
-      <p:sp>
-        <p:nvSpPr>
-          <p:cNvPr id="4" name="TextBox 3"/>
+        </p:spPr>
+        <p:txBody>
+          <a:bodyPr/>
+          <a:lstStyle/>
+          <a:p>
+            <a:endParaRPr lang="en-US"/>
+          </a:p>
+        </p:txBody>
+      </p:sp>
+      <p:sp>
+        <p:nvSpPr>
+          <p:cNvPr id="32" name="Accent Rule"/>
+          <p:cNvSpPr/>
+          <p:nvPr/>
+        </p:nvSpPr>
+        <p:spPr>
+          <a:xfrm>
+            <a:off x="5638800" y="4343400"/>
+            <a:ext cx="914400" cy="45720"/>
+          </a:xfrm>
+          <a:prstGeom prst="roundRect">
+            <a:avLst>
+              <a:gd name="adj" fmla="val 50000"/>
+            </a:avLst>
+          </a:prstGeom>
+          <a:solidFill>
+            <a:srgbClr val="6B7BF7"/>
+          </a:solidFill>
+          <a:ln>
+            <a:noFill/>
+          </a:ln>
+        </p:spPr>
+        <p:txBody>
+          <a:bodyPr/>
+          <a:lstStyle/>
+          <a:p>
+            <a:endParaRPr lang="en-US"/>
+          </a:p>
+        </p:txBody>
+      </p:sp>
+      <p:sp>
+        <p:nvSpPr>
+          <p:cNvPr id="7" name="TextBox 6"/>
           <p:cNvSpPr txBox="1"/>
           <p:nvPr/>
         </p:nvSpPr>
         <p:spPr>
           <a:xfrm>
-            <a:off x="1234440" y="603504"/>
-            <a:ext cx="2743200" cy="402418"/>
+            <a:off x="2758440" y="4640580"/>
+            <a:ext cx="6675120" cy="865943"/>
           </a:xfrm>
           <a:prstGeom prst="rect">
             <a:avLst/>
@@ -3214,238 +3229,7 @@
           </a:bodyPr>
           <a:lstStyle/>
           <a:p>
-            <a:pPr algn="l">
-              <a:lnSpc>
-                <a:spcPct val="105000"/>
-              </a:lnSpc>
-              <a:spcBef>
-                <a:spcPts val="0"/>
-              </a:spcBef>
-              <a:spcAft>
-                <a:spcPts val="600"/>
-              </a:spcAft>
-            </a:pPr>
-            <a:r>
-              <a:rPr sz="2000" b="1" i="0" dirty="0" err="1">
-                <a:solidFill>
-                  <a:srgbClr val="FFFFFF"/>
-                </a:solidFill>
-                <a:latin typeface="Calibri"/>
-              </a:rPr>
-              <a:t>ThreadLine</a:t>
-            </a:r>
-            <a:r>
-              <a:rPr lang="en-US" sz="2000" b="1" dirty="0" err="1">
-                <a:solidFill>
-                  <a:srgbClr val="FFFFFF"/>
-                </a:solidFill>
-                <a:latin typeface="Calibri"/>
-              </a:rPr>
-              <a:t>PMA</a:t>
-            </a:r>
-            <a:endParaRPr sz="2000" b="1" i="0" dirty="0">
-              <a:solidFill>
-                <a:srgbClr val="FFFFFF"/>
-              </a:solidFill>
-              <a:latin typeface="Calibri"/>
-            </a:endParaRPr>
-          </a:p>
-        </p:txBody>
-      </p:sp>
-      <p:sp>
-        <p:nvSpPr>
-          <p:cNvPr id="5" name="TextBox 4"/>
-          <p:cNvSpPr txBox="1"/>
-          <p:nvPr/>
-        </p:nvSpPr>
-        <p:spPr>
-          <a:xfrm>
-            <a:off x="640080" y="2377440"/>
-            <a:ext cx="3108960" cy="2743200"/>
-          </a:xfrm>
-          <a:prstGeom prst="rect">
-            <a:avLst/>
-          </a:prstGeom>
-          <a:noFill/>
-        </p:spPr>
-        <p:txBody>
-          <a:bodyPr wrap="square" anchor="t">
-            <a:spAutoFit/>
-          </a:bodyPr>
-          <a:lstStyle/>
-          <a:p>
-            <a:pPr algn="l">
-              <a:lnSpc>
-                <a:spcPct val="105000"/>
-              </a:lnSpc>
-              <a:spcBef>
-                <a:spcPts val="0"/>
-              </a:spcBef>
-              <a:spcAft>
-                <a:spcPts val="600"/>
-              </a:spcAft>
-            </a:pPr>
-            <a:r>
-              <a:rPr sz="3000" b="1" i="0">
-                <a:solidFill>
-                  <a:srgbClr val="FFFFFF"/>
-                </a:solidFill>
-                <a:latin typeface="Calibri"/>
-              </a:rPr>
-              <a:t>Your projects,</a:t>
-            </a:r>
-          </a:p>
-          <a:p>
-            <a:pPr algn="l">
-              <a:lnSpc>
-                <a:spcPct val="105000"/>
-              </a:lnSpc>
-              <a:spcBef>
-                <a:spcPts val="0"/>
-              </a:spcBef>
-              <a:spcAft>
-                <a:spcPts val="600"/>
-              </a:spcAft>
-            </a:pPr>
-            <a:r>
-              <a:rPr sz="3000" b="1" i="0">
-                <a:solidFill>
-                  <a:srgbClr val="FFFFFF"/>
-                </a:solidFill>
-                <a:latin typeface="Calibri"/>
-              </a:rPr>
-              <a:t>remembered</a:t>
-            </a:r>
-          </a:p>
-          <a:p>
-            <a:pPr algn="l">
-              <a:lnSpc>
-                <a:spcPct val="105000"/>
-              </a:lnSpc>
-              <a:spcBef>
-                <a:spcPts val="0"/>
-              </a:spcBef>
-              <a:spcAft>
-                <a:spcPts val="600"/>
-              </a:spcAft>
-            </a:pPr>
-            <a:r>
-              <a:rPr sz="3000" b="1" i="0">
-                <a:solidFill>
-                  <a:srgbClr val="FFFFFF"/>
-                </a:solidFill>
-                <a:latin typeface="Calibri"/>
-              </a:rPr>
-              <a:t>automatically.</a:t>
-            </a:r>
-          </a:p>
-        </p:txBody>
-      </p:sp>
-      <p:sp>
-        <p:nvSpPr>
-          <p:cNvPr id="6" name="TextBox 5"/>
-          <p:cNvSpPr txBox="1"/>
-          <p:nvPr/>
-        </p:nvSpPr>
-        <p:spPr>
-          <a:xfrm>
-            <a:off x="4754880" y="1737360"/>
-            <a:ext cx="6766560" cy="1304973"/>
-          </a:xfrm>
-          <a:prstGeom prst="rect">
-            <a:avLst/>
-          </a:prstGeom>
-          <a:noFill/>
-        </p:spPr>
-        <p:txBody>
-          <a:bodyPr wrap="square" anchor="t">
-            <a:spAutoFit/>
-          </a:bodyPr>
-          <a:lstStyle/>
-          <a:p>
-            <a:pPr algn="l">
-              <a:lnSpc>
-                <a:spcPct val="105000"/>
-              </a:lnSpc>
-              <a:spcBef>
-                <a:spcPts val="0"/>
-              </a:spcBef>
-              <a:spcAft>
-                <a:spcPts val="1000"/>
-              </a:spcAft>
-            </a:pPr>
-            <a:r>
-              <a:rPr sz="4600" b="1" i="0" dirty="0" err="1">
-                <a:solidFill>
-                  <a:srgbClr val="222222"/>
-                </a:solidFill>
-                <a:latin typeface="Calibri"/>
-              </a:rPr>
-              <a:t>ThreadLine</a:t>
-            </a:r>
-            <a:r>
-              <a:rPr lang="en-US" sz="4600" b="1" i="0" dirty="0" err="1">
-                <a:solidFill>
-                  <a:srgbClr val="222222"/>
-                </a:solidFill>
-                <a:latin typeface="Calibri"/>
-              </a:rPr>
-              <a:t>PMA</a:t>
-            </a:r>
-            <a:endParaRPr sz="4600" b="1" i="0" dirty="0">
-              <a:solidFill>
-                <a:srgbClr val="222222"/>
-              </a:solidFill>
-              <a:latin typeface="Calibri"/>
-            </a:endParaRPr>
-          </a:p>
-          <a:p>
-            <a:pPr algn="l">
-              <a:lnSpc>
-                <a:spcPct val="105000"/>
-              </a:lnSpc>
-              <a:spcBef>
-                <a:spcPts val="0"/>
-              </a:spcBef>
-              <a:spcAft>
-                <a:spcPts val="1000"/>
-              </a:spcAft>
-            </a:pPr>
-            <a:r>
-              <a:rPr sz="2200" b="0" i="0" dirty="0">
-                <a:solidFill>
-                  <a:srgbClr val="767676"/>
-                </a:solidFill>
-                <a:latin typeface="Calibri"/>
-              </a:rPr>
-              <a:t>AI project memory for scattered work</a:t>
-            </a:r>
-          </a:p>
-        </p:txBody>
-      </p:sp>
-      <p:sp>
-        <p:nvSpPr>
-          <p:cNvPr id="7" name="TextBox 6"/>
-          <p:cNvSpPr txBox="1"/>
-          <p:nvPr/>
-        </p:nvSpPr>
-        <p:spPr>
-          <a:xfrm>
-            <a:off x="4754880" y="3474720"/>
-            <a:ext cx="6675120" cy="1828800"/>
-          </a:xfrm>
-          <a:prstGeom prst="rect">
-            <a:avLst/>
-          </a:prstGeom>
-          <a:noFill/>
-        </p:spPr>
-        <p:txBody>
-          <a:bodyPr wrap="square" anchor="t">
-            <a:spAutoFit/>
-          </a:bodyPr>
-          <a:lstStyle/>
-          <a:p>
-            <a:pPr algn="l">
+            <a:pPr algn="ctr">
               <a:lnSpc>
                 <a:spcPct val="125000"/>
               </a:lnSpc>
@@ -3456,61 +3240,18 @@
                 <a:spcPts val="600"/>
               </a:spcAft>
             </a:pPr>
-            <a:r>
-              <a:rPr sz="1800" b="0" i="0">
-                <a:solidFill>
-                  <a:srgbClr val="222222"/>
-                </a:solidFill>
-                <a:latin typeface="Calibri"/>
-              </a:rPr>
-              <a:t>Turn your emails, calendar events, and files into </a:t>
-            </a:r>
-            <a:r>
-              <a:rPr sz="1800" b="1" i="0">
-                <a:solidFill>
-                  <a:srgbClr val="FF5A5F"/>
-                </a:solidFill>
-                <a:latin typeface="Calibri"/>
-              </a:rPr>
-              <a:t>organized projects, timelines, and action items</a:t>
-            </a:r>
-            <a:r>
-              <a:rPr sz="1800" b="0" i="0">
-                <a:solidFill>
-                  <a:srgbClr val="222222"/>
-                </a:solidFill>
-                <a:latin typeface="Calibri"/>
-              </a:rPr>
-              <a:t> — without searching for anything.</a:t>
-            </a:r>
-          </a:p>
-        </p:txBody>
-      </p:sp>
-      <p:sp>
-        <p:nvSpPr>
-          <p:cNvPr id="8" name="TextBox 7"/>
-          <p:cNvSpPr txBox="1"/>
-          <p:nvPr/>
-        </p:nvSpPr>
-        <p:spPr>
-          <a:xfrm>
-            <a:off x="4754880" y="5852160"/>
-            <a:ext cx="6400800" cy="457200"/>
-          </a:xfrm>
-          <a:prstGeom prst="rect">
-            <a:avLst/>
-          </a:prstGeom>
-          <a:noFill/>
-        </p:spPr>
-        <p:txBody>
-          <a:bodyPr wrap="square" anchor="t">
-            <a:spAutoFit/>
-          </a:bodyPr>
-          <a:lstStyle/>
-          <a:p>
-            <a:pPr algn="l">
+            <a:endParaRPr lang="en-US" sz="2000">
+              <a:solidFill>
+                <a:srgbClr val="6B7280"/>
+              </a:solidFill>
+              <a:latin typeface="Segoe UI Semilight" pitchFamily="34" charset="0"/>
+              <a:cs typeface="Segoe UI Semilight" pitchFamily="34" charset="0"/>
+            </a:endParaRPr>
+          </a:p>
+          <a:p>
+            <a:pPr algn="ctr">
               <a:lnSpc>
-                <a:spcPct val="105000"/>
+                <a:spcPct val="125000"/>
               </a:lnSpc>
               <a:spcBef>
                 <a:spcPts val="0"/>
@@ -3520,17 +3261,152 @@
               </a:spcAft>
             </a:pPr>
             <a:r>
-              <a:rPr sz="1300" b="1" i="0">
-                <a:solidFill>
-                  <a:srgbClr val="767676"/>
-                </a:solidFill>
-                <a:latin typeface="Calibri"/>
+              <a:rPr lang="en-US" sz="1800" b="0" i="0">
+                <a:solidFill>
+                  <a:srgbClr val="6B7280"/>
+                </a:solidFill>
+                <a:latin typeface="Segoe UI Semilight" pitchFamily="34" charset="0"/>
+                <a:cs typeface="Segoe UI Semilight" pitchFamily="34" charset="0"/>
               </a:rPr>
-              <a:t>Seed Pitch  ·  2026  ·  Portfolio Demo</a:t>
-            </a:r>
-          </a:p>
-        </p:txBody>
-      </p:sp>
+              <a:t>By: Crystal Xu</a:t>
+            </a:r>
+          </a:p>
+        </p:txBody>
+      </p:sp>
+      <p:sp>
+        <p:nvSpPr>
+          <p:cNvPr id="8" name="TextBox 7"/>
+          <p:cNvSpPr txBox="1"/>
+          <p:nvPr/>
+        </p:nvSpPr>
+        <p:spPr>
+          <a:xfrm>
+            <a:off x="2895600" y="5867400"/>
+            <a:ext cx="6400800" cy="261738"/>
+          </a:xfrm>
+          <a:prstGeom prst="rect">
+            <a:avLst/>
+          </a:prstGeom>
+          <a:noFill/>
+        </p:spPr>
+        <p:txBody>
+          <a:bodyPr wrap="square" anchor="t">
+            <a:spAutoFit/>
+          </a:bodyPr>
+          <a:lstStyle/>
+          <a:p>
+            <a:pPr algn="ctr">
+              <a:lnSpc>
+                <a:spcPct val="105000"/>
+              </a:lnSpc>
+              <a:spcAft>
+                <a:spcPts val="600"/>
+              </a:spcAft>
+            </a:pPr>
+            <a:r>
+              <a:rPr lang="en-US" sz="1100" b="0" i="0" dirty="0">
+                <a:solidFill>
+                  <a:srgbClr val="9AA0AE"/>
+                </a:solidFill>
+                <a:latin typeface="Segoe UI" pitchFamily="34" charset="0"/>
+              </a:rPr>
+              <a:t>Live Product Demo  ·  2026  ·  Personal Project</a:t>
+            </a:r>
+            <a:r>
+              <a:rPr lang="en-US" sz="1100" b="0" dirty="0">
+                <a:solidFill>
+                  <a:srgbClr val="9AA0AE"/>
+                </a:solidFill>
+              </a:rPr>
+              <a:t>  ·  Crystal Xu</a:t>
+            </a:r>
+            <a:endParaRPr lang="en-US" sz="1100" b="0" i="0" dirty="0">
+              <a:solidFill>
+                <a:srgbClr val="9AA0AE"/>
+              </a:solidFill>
+              <a:latin typeface="Segoe UI" pitchFamily="34" charset="0"/>
+            </a:endParaRPr>
+          </a:p>
+        </p:txBody>
+      </p:sp>
+      <p:sp>
+        <p:nvSpPr>
+          <p:cNvPr id="10" name="TextBox 9">
+            <a:extLst>
+              <a:ext uri="{FF2B5EF4-FFF2-40B4-BE49-F238E27FC236}">
+                <a16:creationId xmlns:a16="http://schemas.microsoft.com/office/drawing/2014/main" id="{B55943D4-4CF6-8A82-B6D5-A55C35D1B930}"/>
+              </a:ext>
+            </a:extLst>
+          </p:cNvPr>
+          <p:cNvSpPr txBox="1"/>
+          <p:nvPr/>
+        </p:nvSpPr>
+        <p:spPr>
+          <a:xfrm>
+            <a:off x="2286000" y="3560743"/>
+            <a:ext cx="7620000" cy="954107"/>
+          </a:xfrm>
+          <a:prstGeom prst="rect">
+            <a:avLst/>
+          </a:prstGeom>
+          <a:noFill/>
+        </p:spPr>
+        <p:txBody>
+          <a:bodyPr wrap="square" rtlCol="0">
+            <a:spAutoFit/>
+          </a:bodyPr>
+          <a:lstStyle/>
+          <a:p>
+            <a:pPr algn="ctr"/>
+            <a:r>
+              <a:rPr lang="en-US" sz="1800" b="0" i="0" dirty="0">
+                <a:solidFill>
+                  <a:srgbClr val="2F3545"/>
+                </a:solidFill>
+                <a:latin typeface="Segoe UI Semilight" pitchFamily="34" charset="0"/>
+                <a:cs typeface="Segoe UI Semilight" pitchFamily="34" charset="0"/>
+              </a:rPr>
+              <a:t>Your Automatic Project Memory Assistant: From scattered updates to one clear timeline</a:t>
+            </a:r>
+          </a:p>
+          <a:p>
+            <a:endParaRPr lang="en-US" sz="2000" b="1" dirty="0">
+              <a:latin typeface="Segoe UI Semilight" pitchFamily="34" charset="0"/>
+              <a:cs typeface="Segoe UI Semilight" pitchFamily="34" charset="0"/>
+            </a:endParaRPr>
+          </a:p>
+        </p:txBody>
+      </p:sp>
+      <p:pic>
+        <p:nvPicPr>
+          <p:cNvPr id="11" name="Picture 10">
+            <a:extLst>
+              <a:ext uri="{FF2B5EF4-FFF2-40B4-BE49-F238E27FC236}">
+                <a16:creationId xmlns:a16="http://schemas.microsoft.com/office/drawing/2014/main" id="{B5B8762C-097C-016D-B9F8-22289101CFE7}"/>
+              </a:ext>
+            </a:extLst>
+          </p:cNvPr>
+          <p:cNvPicPr>
+            <a:picLocks noChangeAspect="1"/>
+          </p:cNvPicPr>
+          <p:nvPr/>
+        </p:nvPicPr>
+        <p:blipFill>
+          <a:blip r:embed="rId2"/>
+          <a:stretch>
+            <a:fillRect/>
+          </a:stretch>
+        </p:blipFill>
+        <p:spPr>
+          <a:xfrm>
+            <a:off x="2547165" y="1781467"/>
+            <a:ext cx="6609750" cy="1418399"/>
+          </a:xfrm>
+          <a:prstGeom prst="rect">
+            <a:avLst/>
+          </a:prstGeom>
+        </p:spPr>
+      </p:pic>
     </p:spTree>
   </p:cSld>
   <p:clrMapOvr>
@@ -3544,9 +3420,20 @@
   <p:cSld>
     <p:bg>
       <p:bgPr>
-        <a:solidFill>
-          <a:srgbClr val="FFFFFF"/>
-        </a:solidFill>
+        <a:gradFill rotWithShape="1">
+          <a:gsLst>
+            <a:gs pos="0">
+              <a:srgbClr val="FFFFFF"/>
+            </a:gs>
+            <a:gs pos="55000">
+              <a:srgbClr val="F6F7FE"/>
+            </a:gs>
+            <a:gs pos="100000">
+              <a:srgbClr val="E8EBFC"/>
+            </a:gs>
+          </a:gsLst>
+          <a:lin ang="2700000" scaled="0"/>
+        </a:gradFill>
         <a:effectLst/>
       </p:bgPr>
     </p:bg>
@@ -3566,6 +3453,68 @@
       </p:grpSpPr>
       <p:sp>
         <p:nvSpPr>
+          <p:cNvPr id="40" name="Accent Blob 1"/>
+          <p:cNvSpPr/>
+          <p:nvPr/>
+        </p:nvSpPr>
+        <p:spPr>
+          <a:xfrm>
+            <a:off x="10100000" y="-1500000"/>
+            <a:ext cx="3600000" cy="3600000"/>
+          </a:xfrm>
+          <a:prstGeom prst="ellipse">
+            <a:avLst/>
+          </a:prstGeom>
+          <a:solidFill>
+            <a:srgbClr val="6B7BF7">
+              <a:alpha val="9000"/>
+            </a:srgbClr>
+          </a:solidFill>
+          <a:ln>
+            <a:noFill/>
+          </a:ln>
+        </p:spPr>
+        <p:txBody>
+          <a:bodyPr/>
+          <a:lstStyle/>
+          <a:p>
+            <a:endParaRPr lang="en-US"/>
+          </a:p>
+        </p:txBody>
+      </p:sp>
+      <p:sp>
+        <p:nvSpPr>
+          <p:cNvPr id="41" name="Accent Blob 2"/>
+          <p:cNvSpPr/>
+          <p:nvPr/>
+        </p:nvSpPr>
+        <p:spPr>
+          <a:xfrm>
+            <a:off x="-1600000" y="4900000"/>
+            <a:ext cx="3000000" cy="3000000"/>
+          </a:xfrm>
+          <a:prstGeom prst="ellipse">
+            <a:avLst/>
+          </a:prstGeom>
+          <a:solidFill>
+            <a:srgbClr val="6B7BF7">
+              <a:alpha val="7000"/>
+            </a:srgbClr>
+          </a:solidFill>
+          <a:ln>
+            <a:noFill/>
+          </a:ln>
+        </p:spPr>
+        <p:txBody>
+          <a:bodyPr/>
+          <a:lstStyle/>
+          <a:p>
+            <a:endParaRPr lang="en-US"/>
+          </a:p>
+        </p:txBody>
+      </p:sp>
+      <p:sp>
+        <p:nvSpPr>
           <p:cNvPr id="2" name="TextBox 1"/>
           <p:cNvSpPr txBox="1"/>
           <p:nvPr/>
@@ -3573,7 +3522,7 @@
         <p:spPr>
           <a:xfrm>
             <a:off x="640080" y="548640"/>
-            <a:ext cx="3657600" cy="365760"/>
+            <a:ext cx="3657600" cy="293863"/>
           </a:xfrm>
           <a:prstGeom prst="rect">
             <a:avLst/>
@@ -3598,9 +3547,9 @@
               </a:spcAft>
             </a:pPr>
             <a:r>
-              <a:rPr sz="1300" b="1" i="0">
-                <a:solidFill>
-                  <a:srgbClr val="FF5A5F"/>
+              <a:rPr lang="en-US" sz="1300" b="1" i="0">
+                <a:solidFill>
+                  <a:srgbClr val="6B7BF7"/>
                 </a:solidFill>
                 <a:latin typeface="Calibri"/>
               </a:rPr>
@@ -3618,7 +3567,7 @@
         <p:spPr>
           <a:xfrm>
             <a:off x="640080" y="914400"/>
-            <a:ext cx="10972800" cy="1097280"/>
+            <a:ext cx="10972800" cy="557460"/>
           </a:xfrm>
           <a:prstGeom prst="rect">
             <a:avLst/>
@@ -3643,14 +3592,20 @@
               </a:spcAft>
             </a:pPr>
             <a:r>
-              <a:rPr sz="3000" b="1" i="0">
-                <a:solidFill>
-                  <a:srgbClr val="222222"/>
+              <a:rPr lang="en-US" sz="3000" b="1" dirty="0">
+                <a:solidFill>
+                  <a:srgbClr val="2F3545"/>
                 </a:solidFill>
                 <a:latin typeface="Calibri"/>
               </a:rPr>
-              <a:t>Project context is scattered — and you rebuild it by hand.</a:t>
-            </a:r>
+              <a:t>Imagine After You Came Back from a Vacation/Break</a:t>
+            </a:r>
+            <a:endParaRPr lang="en-US" sz="3000" b="1" i="0" dirty="0">
+              <a:solidFill>
+                <a:srgbClr val="2F3545"/>
+              </a:solidFill>
+              <a:latin typeface="Calibri"/>
+            </a:endParaRPr>
           </a:p>
         </p:txBody>
       </p:sp>
@@ -3669,7 +3624,7 @@
             <a:avLst/>
           </a:prstGeom>
           <a:solidFill>
-            <a:srgbClr val="F7F7F7"/>
+            <a:srgbClr val="FFFFFF"/>
           </a:solidFill>
           <a:ln>
             <a:noFill/>
@@ -3714,7 +3669,7 @@
             <a:avLst/>
           </a:prstGeom>
           <a:solidFill>
-            <a:srgbClr val="FF5A5F"/>
+            <a:srgbClr val="6B7BF7"/>
           </a:solidFill>
           <a:ln>
             <a:noFill/>
@@ -3753,7 +3708,7 @@
         <p:spPr>
           <a:xfrm>
             <a:off x="960120" y="2743200"/>
-            <a:ext cx="2880360" cy="640080"/>
+            <a:ext cx="2880360" cy="402418"/>
           </a:xfrm>
           <a:prstGeom prst="rect">
             <a:avLst/>
@@ -3766,7 +3721,7 @@
           </a:bodyPr>
           <a:lstStyle/>
           <a:p>
-            <a:pPr algn="l">
+            <a:pPr algn="ctr">
               <a:lnSpc>
                 <a:spcPct val="105000"/>
               </a:lnSpc>
@@ -3778,13 +3733,13 @@
               </a:spcAft>
             </a:pPr>
             <a:r>
-              <a:rPr sz="2000" b="1" i="0">
-                <a:solidFill>
-                  <a:srgbClr val="222222"/>
+              <a:rPr lang="en-US" sz="2000" b="1" i="0">
+                <a:solidFill>
+                  <a:srgbClr val="2F3545"/>
                 </a:solidFill>
                 <a:latin typeface="Calibri"/>
               </a:rPr>
-              <a:t>Endless searching</a:t>
+              <a:t>Inbox Flooding</a:t>
             </a:r>
           </a:p>
         </p:txBody>
@@ -3798,7 +3753,7 @@
         <p:spPr>
           <a:xfrm>
             <a:off x="960120" y="3520440"/>
-            <a:ext cx="2880360" cy="1828800"/>
+            <a:ext cx="2880360" cy="936603"/>
           </a:xfrm>
           <a:prstGeom prst="rect">
             <a:avLst/>
@@ -3823,13 +3778,13 @@
               </a:spcAft>
             </a:pPr>
             <a:r>
-              <a:rPr sz="1500" b="0" i="0">
-                <a:solidFill>
-                  <a:srgbClr val="767676"/>
+              <a:rPr lang="en-US" sz="1500" b="0" i="0">
+                <a:solidFill>
+                  <a:srgbClr val="6B7280"/>
                 </a:solidFill>
                 <a:latin typeface="Calibri"/>
               </a:rPr>
-              <a:t>Hunt across inboxes, folders, and apps by keyword and sender just to find what belongs to one project.</a:t>
+              <a:t>Hundreds of unread emails and calendar invites waiting after one week away</a:t>
             </a:r>
           </a:p>
         </p:txBody>
@@ -3849,7 +3804,7 @@
             <a:avLst/>
           </a:prstGeom>
           <a:solidFill>
-            <a:srgbClr val="F7F7F7"/>
+            <a:srgbClr val="FFFFFF"/>
           </a:solidFill>
           <a:ln>
             <a:noFill/>
@@ -3894,7 +3849,7 @@
             <a:avLst/>
           </a:prstGeom>
           <a:solidFill>
-            <a:srgbClr val="FF5A5F"/>
+            <a:srgbClr val="6B7BF7"/>
           </a:solidFill>
           <a:ln>
             <a:noFill/>
@@ -3933,7 +3888,7 @@
         <p:spPr>
           <a:xfrm>
             <a:off x="4654296" y="2743200"/>
-            <a:ext cx="2880360" cy="640080"/>
+            <a:ext cx="2880360" cy="402418"/>
           </a:xfrm>
           <a:prstGeom prst="rect">
             <a:avLst/>
@@ -3946,7 +3901,7 @@
           </a:bodyPr>
           <a:lstStyle/>
           <a:p>
-            <a:pPr algn="l">
+            <a:pPr algn="ctr">
               <a:lnSpc>
                 <a:spcPct val="105000"/>
               </a:lnSpc>
@@ -3958,13 +3913,13 @@
               </a:spcAft>
             </a:pPr>
             <a:r>
-              <a:rPr sz="2000" b="1" i="0">
-                <a:solidFill>
-                  <a:srgbClr val="222222"/>
+              <a:rPr lang="en-US" sz="2000" b="1" i="0">
+                <a:solidFill>
+                  <a:srgbClr val="2F3545"/>
                 </a:solidFill>
                 <a:latin typeface="Calibri"/>
               </a:rPr>
-              <a:t>Lost connections</a:t>
+              <a:t>Missing context</a:t>
             </a:r>
           </a:p>
         </p:txBody>
@@ -3978,7 +3933,7 @@
         <p:spPr>
           <a:xfrm>
             <a:off x="4654296" y="3520440"/>
-            <a:ext cx="2880360" cy="1828800"/>
+            <a:ext cx="2880360" cy="648063"/>
           </a:xfrm>
           <a:prstGeom prst="rect">
             <a:avLst/>
@@ -4003,13 +3958,13 @@
               </a:spcAft>
             </a:pPr>
             <a:r>
-              <a:rPr sz="1500" b="0" i="0">
-                <a:solidFill>
-                  <a:srgbClr val="767676"/>
+              <a:rPr lang="en-US" sz="1500" b="0" i="0">
+                <a:solidFill>
+                  <a:srgbClr val="6B7280"/>
                 </a:solidFill>
                 <a:latin typeface="Calibri"/>
               </a:rPr>
-              <a:t>Related messages, files, and meetings use different words and live in different tools — so they get missed.</a:t>
+              <a:t>What happened, when, and what was decided? </a:t>
             </a:r>
           </a:p>
         </p:txBody>
@@ -4029,7 +3984,7 @@
             <a:avLst/>
           </a:prstGeom>
           <a:solidFill>
-            <a:srgbClr val="F7F7F7"/>
+            <a:srgbClr val="FFFFFF"/>
           </a:solidFill>
           <a:ln>
             <a:noFill/>
@@ -4074,7 +4029,7 @@
             <a:avLst/>
           </a:prstGeom>
           <a:solidFill>
-            <a:srgbClr val="FF5A5F"/>
+            <a:srgbClr val="6B7BF7"/>
           </a:solidFill>
           <a:ln>
             <a:noFill/>
@@ -4113,7 +4068,97 @@
         <p:spPr>
           <a:xfrm>
             <a:off x="8348472" y="2743200"/>
-            <a:ext cx="2880360" cy="640080"/>
+            <a:ext cx="2880360" cy="402418"/>
+          </a:xfrm>
+          <a:prstGeom prst="rect">
+            <a:avLst/>
+          </a:prstGeom>
+          <a:noFill/>
+        </p:spPr>
+        <p:txBody>
+          <a:bodyPr wrap="square" anchor="t">
+            <a:spAutoFit/>
+          </a:bodyPr>
+          <a:lstStyle/>
+          <a:p>
+            <a:pPr algn="ctr">
+              <a:lnSpc>
+                <a:spcPct val="105000"/>
+              </a:lnSpc>
+              <a:spcBef>
+                <a:spcPts val="0"/>
+              </a:spcBef>
+              <a:spcAft>
+                <a:spcPts val="600"/>
+              </a:spcAft>
+            </a:pPr>
+            <a:r>
+              <a:rPr lang="en-US" sz="2000" b="1" i="0">
+                <a:solidFill>
+                  <a:srgbClr val="2F3545"/>
+                </a:solidFill>
+                <a:latin typeface="Calibri"/>
+              </a:rPr>
+              <a:t>Manual catch-up</a:t>
+            </a:r>
+          </a:p>
+        </p:txBody>
+      </p:sp>
+      <p:sp>
+        <p:nvSpPr>
+          <p:cNvPr id="15" name="TextBox 14"/>
+          <p:cNvSpPr txBox="1"/>
+          <p:nvPr/>
+        </p:nvSpPr>
+        <p:spPr>
+          <a:xfrm>
+            <a:off x="8348472" y="3520440"/>
+            <a:ext cx="2880360" cy="648063"/>
+          </a:xfrm>
+          <a:prstGeom prst="rect">
+            <a:avLst/>
+          </a:prstGeom>
+          <a:noFill/>
+        </p:spPr>
+        <p:txBody>
+          <a:bodyPr wrap="square" anchor="t">
+            <a:spAutoFit/>
+          </a:bodyPr>
+          <a:lstStyle/>
+          <a:p>
+            <a:pPr algn="l">
+              <a:lnSpc>
+                <a:spcPct val="125000"/>
+              </a:lnSpc>
+              <a:spcBef>
+                <a:spcPts val="0"/>
+              </a:spcBef>
+              <a:spcAft>
+                <a:spcPts val="600"/>
+              </a:spcAft>
+            </a:pPr>
+            <a:r>
+              <a:rPr lang="en-US" sz="1500" b="0" i="0">
+                <a:solidFill>
+                  <a:srgbClr val="6B7280"/>
+                </a:solidFill>
+                <a:latin typeface="Calibri"/>
+              </a:rPr>
+              <a:t>Scroll back from the oldest unread message to rebuild every project</a:t>
+            </a:r>
+          </a:p>
+        </p:txBody>
+      </p:sp>
+      <p:sp>
+        <p:nvSpPr>
+          <p:cNvPr id="16" name="TextBox 15"/>
+          <p:cNvSpPr txBox="1"/>
+          <p:nvPr/>
+        </p:nvSpPr>
+        <p:spPr>
+          <a:xfrm>
+            <a:off x="640080" y="5852160"/>
+            <a:ext cx="10972800" cy="355931"/>
           </a:xfrm>
           <a:prstGeom prst="rect">
             <a:avLst/>
@@ -4138,116 +4183,95 @@
               </a:spcAft>
             </a:pPr>
             <a:r>
-              <a:rPr sz="2000" b="1" i="0">
-                <a:solidFill>
-                  <a:srgbClr val="222222"/>
+              <a:rPr lang="en-US" sz="1700" b="1" i="0">
+                <a:solidFill>
+                  <a:srgbClr val="2F3545"/>
                 </a:solidFill>
                 <a:latin typeface="Calibri"/>
               </a:rPr>
-              <a:t>No memory</a:t>
-            </a:r>
-          </a:p>
-        </p:txBody>
-      </p:sp>
-      <p:sp>
-        <p:nvSpPr>
-          <p:cNvPr id="15" name="TextBox 14"/>
-          <p:cNvSpPr txBox="1"/>
-          <p:nvPr/>
-        </p:nvSpPr>
-        <p:spPr>
-          <a:xfrm>
-            <a:off x="8348472" y="3520440"/>
-            <a:ext cx="2880360" cy="1828800"/>
+              <a:t>The result: hours — sometimes days — spent just getting back up to speed</a:t>
+            </a:r>
+            <a:endParaRPr lang="en-US" sz="1700" b="0" i="0">
+              <a:solidFill>
+                <a:srgbClr val="6B7280"/>
+              </a:solidFill>
+              <a:latin typeface="Calibri"/>
+            </a:endParaRPr>
+          </a:p>
+        </p:txBody>
+      </p:sp>
+      <p:pic>
+        <p:nvPicPr>
+          <p:cNvPr id="51" name="Card Icon 1"/>
+          <p:cNvPicPr>
+            <a:picLocks noChangeAspect="1"/>
+          </p:cNvPicPr>
+          <p:nvPr/>
+        </p:nvPicPr>
+        <p:blipFill>
+          <a:blip r:embed="rId2"/>
+          <a:stretch>
+            <a:fillRect/>
+          </a:stretch>
+        </p:blipFill>
+        <p:spPr>
+          <a:xfrm>
+            <a:off x="1981200" y="4495800"/>
+            <a:ext cx="838200" cy="838200"/>
           </a:xfrm>
           <a:prstGeom prst="rect">
             <a:avLst/>
           </a:prstGeom>
-          <a:noFill/>
-        </p:spPr>
-        <p:txBody>
-          <a:bodyPr wrap="square" anchor="t">
-            <a:spAutoFit/>
-          </a:bodyPr>
-          <a:lstStyle/>
-          <a:p>
-            <a:pPr algn="l">
-              <a:lnSpc>
-                <a:spcPct val="125000"/>
-              </a:lnSpc>
-              <a:spcBef>
-                <a:spcPts val="0"/>
-              </a:spcBef>
-              <a:spcAft>
-                <a:spcPts val="600"/>
-              </a:spcAft>
-            </a:pPr>
-            <a:r>
-              <a:rPr sz="1500" b="0" i="0">
-                <a:solidFill>
-                  <a:srgbClr val="767676"/>
-                </a:solidFill>
-                <a:latin typeface="Calibri"/>
-              </a:rPr>
-              <a:t>When did we decide this? Where's that file? What's still open? The history has to be reconstructed every time.</a:t>
-            </a:r>
-          </a:p>
-        </p:txBody>
-      </p:sp>
-      <p:sp>
-        <p:nvSpPr>
-          <p:cNvPr id="16" name="TextBox 15"/>
-          <p:cNvSpPr txBox="1"/>
-          <p:nvPr/>
-        </p:nvSpPr>
-        <p:spPr>
-          <a:xfrm>
-            <a:off x="640080" y="5852160"/>
-            <a:ext cx="10972800" cy="731520"/>
+        </p:spPr>
+      </p:pic>
+      <p:pic>
+        <p:nvPicPr>
+          <p:cNvPr id="52" name="Card Icon 2"/>
+          <p:cNvPicPr>
+            <a:picLocks noChangeAspect="1"/>
+          </p:cNvPicPr>
+          <p:nvPr/>
+        </p:nvPicPr>
+        <p:blipFill>
+          <a:blip r:embed="rId3"/>
+          <a:stretch>
+            <a:fillRect/>
+          </a:stretch>
+        </p:blipFill>
+        <p:spPr>
+          <a:xfrm>
+            <a:off x="5675376" y="4495800"/>
+            <a:ext cx="1011936" cy="1011936"/>
           </a:xfrm>
           <a:prstGeom prst="rect">
             <a:avLst/>
           </a:prstGeom>
-          <a:noFill/>
-        </p:spPr>
-        <p:txBody>
-          <a:bodyPr wrap="square" anchor="t">
-            <a:spAutoFit/>
-          </a:bodyPr>
-          <a:lstStyle/>
-          <a:p>
-            <a:pPr algn="l">
-              <a:lnSpc>
-                <a:spcPct val="105000"/>
-              </a:lnSpc>
-              <a:spcBef>
-                <a:spcPts val="0"/>
-              </a:spcBef>
-              <a:spcAft>
-                <a:spcPts val="600"/>
-              </a:spcAft>
-            </a:pPr>
-            <a:r>
-              <a:rPr sz="1700" b="1" i="0">
-                <a:solidFill>
-                  <a:srgbClr val="222222"/>
-                </a:solidFill>
-                <a:latin typeface="Calibri"/>
-              </a:rPr>
-              <a:t>The result: </a:t>
-            </a:r>
-            <a:r>
-              <a:rPr sz="1700" b="0" i="0">
-                <a:solidFill>
-                  <a:srgbClr val="767676"/>
-                </a:solidFill>
-                <a:latin typeface="Calibri"/>
-              </a:rPr>
-              <a:t>knowledge workers waste hours a week reassembling what they already have.</a:t>
-            </a:r>
-          </a:p>
-        </p:txBody>
-      </p:sp>
+        </p:spPr>
+      </p:pic>
+      <p:pic>
+        <p:nvPicPr>
+          <p:cNvPr id="53" name="Card Icon 3"/>
+          <p:cNvPicPr>
+            <a:picLocks noChangeAspect="1"/>
+          </p:cNvPicPr>
+          <p:nvPr/>
+        </p:nvPicPr>
+        <p:blipFill>
+          <a:blip r:embed="rId4"/>
+          <a:stretch>
+            <a:fillRect/>
+          </a:stretch>
+        </p:blipFill>
+        <p:spPr>
+          <a:xfrm>
+            <a:off x="9368028" y="4543325"/>
+            <a:ext cx="841248" cy="841248"/>
+          </a:xfrm>
+          <a:prstGeom prst="rect">
+            <a:avLst/>
+          </a:prstGeom>
+        </p:spPr>
+      </p:pic>
     </p:spTree>
   </p:cSld>
   <p:clrMapOvr>
@@ -4261,9 +4285,20 @@
   <p:cSld>
     <p:bg>
       <p:bgPr>
-        <a:solidFill>
-          <a:srgbClr val="FFFFFF"/>
-        </a:solidFill>
+        <a:gradFill rotWithShape="1">
+          <a:gsLst>
+            <a:gs pos="0">
+              <a:srgbClr val="FFFFFF"/>
+            </a:gs>
+            <a:gs pos="55000">
+              <a:srgbClr val="F6F7FE"/>
+            </a:gs>
+            <a:gs pos="100000">
+              <a:srgbClr val="E8EBFC"/>
+            </a:gs>
+          </a:gsLst>
+          <a:lin ang="2700000" scaled="0"/>
+        </a:gradFill>
         <a:effectLst/>
       </p:bgPr>
     </p:bg>
@@ -4283,6 +4318,68 @@
       </p:grpSpPr>
       <p:sp>
         <p:nvSpPr>
+          <p:cNvPr id="40" name="Accent Blob 1"/>
+          <p:cNvSpPr/>
+          <p:nvPr/>
+        </p:nvSpPr>
+        <p:spPr>
+          <a:xfrm>
+            <a:off x="10100000" y="-1500000"/>
+            <a:ext cx="3600000" cy="3600000"/>
+          </a:xfrm>
+          <a:prstGeom prst="ellipse">
+            <a:avLst/>
+          </a:prstGeom>
+          <a:solidFill>
+            <a:srgbClr val="6B7BF7">
+              <a:alpha val="9000"/>
+            </a:srgbClr>
+          </a:solidFill>
+          <a:ln>
+            <a:noFill/>
+          </a:ln>
+        </p:spPr>
+        <p:txBody>
+          <a:bodyPr/>
+          <a:lstStyle/>
+          <a:p>
+            <a:endParaRPr lang="en-US"/>
+          </a:p>
+        </p:txBody>
+      </p:sp>
+      <p:sp>
+        <p:nvSpPr>
+          <p:cNvPr id="41" name="Accent Blob 2"/>
+          <p:cNvSpPr/>
+          <p:nvPr/>
+        </p:nvSpPr>
+        <p:spPr>
+          <a:xfrm>
+            <a:off x="-1600000" y="4900000"/>
+            <a:ext cx="3000000" cy="3000000"/>
+          </a:xfrm>
+          <a:prstGeom prst="ellipse">
+            <a:avLst/>
+          </a:prstGeom>
+          <a:solidFill>
+            <a:srgbClr val="6B7BF7">
+              <a:alpha val="7000"/>
+            </a:srgbClr>
+          </a:solidFill>
+          <a:ln>
+            <a:noFill/>
+          </a:ln>
+        </p:spPr>
+        <p:txBody>
+          <a:bodyPr/>
+          <a:lstStyle/>
+          <a:p>
+            <a:endParaRPr lang="en-US"/>
+          </a:p>
+        </p:txBody>
+      </p:sp>
+      <p:sp>
+        <p:nvSpPr>
           <p:cNvPr id="2" name="TextBox 1"/>
           <p:cNvSpPr txBox="1"/>
           <p:nvPr/>
@@ -4290,7 +4387,7 @@
         <p:spPr>
           <a:xfrm>
             <a:off x="640080" y="548640"/>
-            <a:ext cx="3657600" cy="365760"/>
+            <a:ext cx="3657600" cy="293863"/>
           </a:xfrm>
           <a:prstGeom prst="rect">
             <a:avLst/>
@@ -4315,9 +4412,9 @@
               </a:spcAft>
             </a:pPr>
             <a:r>
-              <a:rPr sz="1300" b="1" i="0">
-                <a:solidFill>
-                  <a:srgbClr val="00A699"/>
+              <a:rPr lang="en-US" sz="1300" b="1" i="0">
+                <a:solidFill>
+                  <a:srgbClr val="6B7BF7"/>
                 </a:solidFill>
                 <a:latin typeface="Calibri"/>
               </a:rPr>
@@ -4335,7 +4432,7 @@
         <p:spPr>
           <a:xfrm>
             <a:off x="640080" y="914400"/>
-            <a:ext cx="10972800" cy="1097280"/>
+            <a:ext cx="10972800" cy="1042208"/>
           </a:xfrm>
           <a:prstGeom prst="rect">
             <a:avLst/>
@@ -4360,222 +4457,29 @@
               </a:spcAft>
             </a:pPr>
             <a:r>
-              <a:rPr sz="3000" b="1" i="0">
-                <a:solidFill>
-                  <a:srgbClr val="222222"/>
+              <a:rPr lang="en-US" sz="3000" b="1" i="0" dirty="0">
+                <a:solidFill>
+                  <a:srgbClr val="2F3545"/>
                 </a:solidFill>
                 <a:latin typeface="Calibri"/>
               </a:rPr>
-              <a:t>Semantic memory that assembles the project for you.</a:t>
-            </a:r>
-          </a:p>
-        </p:txBody>
-      </p:sp>
-      <p:sp>
-        <p:nvSpPr>
-          <p:cNvPr id="4" name="TextBox 3"/>
-          <p:cNvSpPr txBox="1"/>
-          <p:nvPr/>
-        </p:nvSpPr>
-        <p:spPr>
-          <a:xfrm>
-            <a:off x="640080" y="2148840"/>
-            <a:ext cx="5212080" cy="3657600"/>
-          </a:xfrm>
-          <a:prstGeom prst="rect">
-            <a:avLst/>
-          </a:prstGeom>
-          <a:noFill/>
-        </p:spPr>
-        <p:txBody>
-          <a:bodyPr wrap="square">
-            <a:spAutoFit/>
-          </a:bodyPr>
-          <a:lstStyle/>
-          <a:p>
-            <a:pPr>
-              <a:lnSpc>
-                <a:spcPct val="108000"/>
-              </a:lnSpc>
-              <a:spcAft>
-                <a:spcPts val="1300"/>
-              </a:spcAft>
-            </a:pPr>
-            <a:r>
-              <a:rPr sz="1600" b="1">
-                <a:solidFill>
-                  <a:srgbClr val="00A699"/>
+              <a:t>An AI-Powered Project </a:t>
+            </a:r>
+            <a:r>
+              <a:rPr lang="en-US" sz="3000" b="1" dirty="0">
+                <a:solidFill>
+                  <a:srgbClr val="2F3545"/>
                 </a:solidFill>
                 <a:latin typeface="Calibri"/>
               </a:rPr>
-              <a:t>✓  </a:t>
-            </a:r>
-            <a:r>
-              <a:rPr sz="1600" b="1">
-                <a:solidFill>
-                  <a:srgbClr val="222222"/>
-                </a:solidFill>
-                <a:latin typeface="Calibri"/>
-              </a:rPr>
-              <a:t>Understands meaning</a:t>
-            </a:r>
-            <a:r>
-              <a:rPr sz="1600" b="0">
-                <a:solidFill>
-                  <a:srgbClr val="767676"/>
-                </a:solidFill>
-                <a:latin typeface="Calibri"/>
-              </a:rPr>
-              <a:t>  groups related items even when the words don't match.</a:t>
-            </a:r>
-          </a:p>
-          <a:p>
-            <a:pPr>
-              <a:lnSpc>
-                <a:spcPct val="108000"/>
-              </a:lnSpc>
-              <a:spcAft>
-                <a:spcPts val="1300"/>
-              </a:spcAft>
-            </a:pPr>
-            <a:r>
-              <a:rPr sz="1600" b="1">
-                <a:solidFill>
-                  <a:srgbClr val="00A699"/>
-                </a:solidFill>
-                <a:latin typeface="Calibri"/>
-              </a:rPr>
-              <a:t>✓  </a:t>
-            </a:r>
-            <a:r>
-              <a:rPr sz="1600" b="1">
-                <a:solidFill>
-                  <a:srgbClr val="222222"/>
-                </a:solidFill>
-                <a:latin typeface="Calibri"/>
-              </a:rPr>
-              <a:t>Builds the timeline</a:t>
-            </a:r>
-            <a:r>
-              <a:rPr sz="1600" b="0">
-                <a:solidFill>
-                  <a:srgbClr val="767676"/>
-                </a:solidFill>
-                <a:latin typeface="Calibri"/>
-              </a:rPr>
-              <a:t>  meetings, files, decisions, and deadlines in order.</a:t>
-            </a:r>
-          </a:p>
-          <a:p>
-            <a:pPr>
-              <a:lnSpc>
-                <a:spcPct val="108000"/>
-              </a:lnSpc>
-              <a:spcAft>
-                <a:spcPts val="1300"/>
-              </a:spcAft>
-            </a:pPr>
-            <a:r>
-              <a:rPr sz="1600" b="1">
-                <a:solidFill>
-                  <a:srgbClr val="00A699"/>
-                </a:solidFill>
-                <a:latin typeface="Calibri"/>
-              </a:rPr>
-              <a:t>✓  </a:t>
-            </a:r>
-            <a:r>
-              <a:rPr sz="1600" b="1">
-                <a:solidFill>
-                  <a:srgbClr val="222222"/>
-                </a:solidFill>
-                <a:latin typeface="Calibri"/>
-              </a:rPr>
-              <a:t>Surfaces action items</a:t>
-            </a:r>
-            <a:r>
-              <a:rPr sz="1600" b="0">
-                <a:solidFill>
-                  <a:srgbClr val="767676"/>
-                </a:solidFill>
-                <a:latin typeface="Calibri"/>
-              </a:rPr>
-              <a:t>  what's open, who owns it, what's next.</a:t>
-            </a:r>
-          </a:p>
-          <a:p>
-            <a:pPr>
-              <a:lnSpc>
-                <a:spcPct val="108000"/>
-              </a:lnSpc>
-              <a:spcAft>
-                <a:spcPts val="1300"/>
-              </a:spcAft>
-            </a:pPr>
-            <a:r>
-              <a:rPr sz="1600" b="1">
-                <a:solidFill>
-                  <a:srgbClr val="00A699"/>
-                </a:solidFill>
-                <a:latin typeface="Calibri"/>
-              </a:rPr>
-              <a:t>✓  </a:t>
-            </a:r>
-            <a:r>
-              <a:rPr sz="1600" b="1">
-                <a:solidFill>
-                  <a:srgbClr val="222222"/>
-                </a:solidFill>
-                <a:latin typeface="Calibri"/>
-              </a:rPr>
-              <a:t>Always source-linked</a:t>
-            </a:r>
-            <a:r>
-              <a:rPr sz="1600" b="0">
-                <a:solidFill>
-                  <a:srgbClr val="767676"/>
-                </a:solidFill>
-                <a:latin typeface="Calibri"/>
-              </a:rPr>
-              <a:t>  click any entry to verify the original message or file.</a:t>
-            </a:r>
-          </a:p>
-          <a:p>
-            <a:pPr>
-              <a:lnSpc>
-                <a:spcPct val="108000"/>
-              </a:lnSpc>
-              <a:spcAft>
-                <a:spcPts val="1300"/>
-              </a:spcAft>
-            </a:pPr>
-            <a:r>
-              <a:rPr sz="1600" b="1">
-                <a:solidFill>
-                  <a:srgbClr val="00A699"/>
-                </a:solidFill>
-                <a:latin typeface="Calibri"/>
-              </a:rPr>
-              <a:t>✓  </a:t>
-            </a:r>
-            <a:r>
-              <a:rPr sz="1600" b="1">
-                <a:solidFill>
-                  <a:srgbClr val="222222"/>
-                </a:solidFill>
-                <a:latin typeface="Calibri"/>
-              </a:rPr>
-              <a:t>You stay in control</a:t>
-            </a:r>
-            <a:r>
-              <a:rPr sz="1600" b="0">
-                <a:solidFill>
-                  <a:srgbClr val="767676"/>
-                </a:solidFill>
-                <a:latin typeface="Calibri"/>
-              </a:rPr>
-              <a:t>  review, edit, and correct what the AI concludes.</a:t>
-            </a:r>
+              <a:t>Memory Assistant Where Project Managers use it to:</a:t>
+            </a:r>
+            <a:endParaRPr lang="en-US" sz="3000" b="1" i="0" dirty="0">
+              <a:solidFill>
+                <a:srgbClr val="2F3545"/>
+              </a:solidFill>
+              <a:latin typeface="Calibri"/>
+            </a:endParaRPr>
           </a:p>
         </p:txBody>
       </p:sp>
@@ -4594,7 +4498,7 @@
             <a:avLst/>
           </a:prstGeom>
           <a:solidFill>
-            <a:srgbClr val="F7F7F7"/>
+            <a:srgbClr val="FFFFFF"/>
           </a:solidFill>
           <a:ln>
             <a:noFill/>
@@ -4639,7 +4543,7 @@
             <a:avLst/>
           </a:prstGeom>
           <a:solidFill>
-            <a:srgbClr val="00A699"/>
+            <a:srgbClr val="6B7BF7"/>
           </a:solidFill>
           <a:ln>
             <a:noFill/>
@@ -4678,7 +4582,7 @@
         <p:spPr>
           <a:xfrm>
             <a:off x="6446520" y="2258568"/>
-            <a:ext cx="4846320" cy="457200"/>
+            <a:ext cx="4846320" cy="386965"/>
           </a:xfrm>
           <a:prstGeom prst="rect">
             <a:avLst/>
@@ -4703,13 +4607,13 @@
               </a:spcAft>
             </a:pPr>
             <a:r>
-              <a:rPr sz="1900" b="1" i="0">
-                <a:solidFill>
-                  <a:srgbClr val="00A699"/>
+              <a:rPr lang="en-US" sz="1900" b="1" i="0">
+                <a:solidFill>
+                  <a:srgbClr val="6B7BF7"/>
                 </a:solidFill>
                 <a:latin typeface="Calibri"/>
               </a:rPr>
-              <a:t>1  Connect</a:t>
+              <a:t>Connect</a:t>
             </a:r>
           </a:p>
         </p:txBody>
@@ -4723,7 +4627,7 @@
         <p:spPr>
           <a:xfrm>
             <a:off x="6446520" y="2660904"/>
-            <a:ext cx="4937760" cy="457200"/>
+            <a:ext cx="4937760" cy="309315"/>
           </a:xfrm>
           <a:prstGeom prst="rect">
             <a:avLst/>
@@ -4748,13 +4652,13 @@
               </a:spcAft>
             </a:pPr>
             <a:r>
-              <a:rPr sz="1400" b="0" i="0">
-                <a:solidFill>
-                  <a:srgbClr val="767676"/>
+              <a:rPr lang="en-US" sz="1400" b="0" i="0" dirty="0">
+                <a:solidFill>
+                  <a:srgbClr val="6B7280"/>
                 </a:solidFill>
                 <a:latin typeface="Calibri"/>
               </a:rPr>
-              <a:t>Add Gmail, Google Calendar, or upload your files.</a:t>
+              <a:t>Gmail and Google Calendar, read-only access -- nothing else</a:t>
             </a:r>
           </a:p>
         </p:txBody>
@@ -4774,7 +4678,7 @@
             <a:avLst/>
           </a:prstGeom>
           <a:solidFill>
-            <a:srgbClr val="F7F7F7"/>
+            <a:srgbClr val="FFFFFF"/>
           </a:solidFill>
           <a:ln>
             <a:noFill/>
@@ -4819,7 +4723,7 @@
             <a:avLst/>
           </a:prstGeom>
           <a:solidFill>
-            <a:srgbClr val="00A699"/>
+            <a:srgbClr val="6B7BF7"/>
           </a:solidFill>
           <a:ln>
             <a:noFill/>
@@ -4858,7 +4762,7 @@
         <p:spPr>
           <a:xfrm>
             <a:off x="6446520" y="3493008"/>
-            <a:ext cx="4846320" cy="457200"/>
+            <a:ext cx="4846320" cy="386965"/>
           </a:xfrm>
           <a:prstGeom prst="rect">
             <a:avLst/>
@@ -4883,13 +4787,13 @@
               </a:spcAft>
             </a:pPr>
             <a:r>
-              <a:rPr sz="1900" b="1" i="0">
-                <a:solidFill>
-                  <a:srgbClr val="00A699"/>
+              <a:rPr lang="en-US" sz="1900" b="1" i="0">
+                <a:solidFill>
+                  <a:srgbClr val="6B7BF7"/>
                 </a:solidFill>
                 <a:latin typeface="Calibri"/>
               </a:rPr>
-              <a:t>2  Organize</a:t>
+              <a:t>Organize</a:t>
             </a:r>
           </a:p>
         </p:txBody>
@@ -4903,7 +4807,7 @@
         <p:spPr>
           <a:xfrm>
             <a:off x="6446520" y="3895344"/>
-            <a:ext cx="4937760" cy="457200"/>
+            <a:ext cx="4937760" cy="535531"/>
           </a:xfrm>
           <a:prstGeom prst="rect">
             <a:avLst/>
@@ -4928,13 +4832,13 @@
               </a:spcAft>
             </a:pPr>
             <a:r>
-              <a:rPr sz="1400" b="0" i="0">
-                <a:solidFill>
-                  <a:srgbClr val="767676"/>
+              <a:rPr lang="en-US" sz="1400" b="0" i="0" dirty="0">
+                <a:solidFill>
+                  <a:srgbClr val="6B7280"/>
                 </a:solidFill>
                 <a:latin typeface="Calibri"/>
               </a:rPr>
-              <a:t>AI groups everything into projects by meaning, not keywords.</a:t>
+              <a:t>AI groups messages and events into projects and extracts decisions and action items -- Nothing needed from you</a:t>
             </a:r>
           </a:p>
         </p:txBody>
@@ -4954,7 +4858,7 @@
             <a:avLst/>
           </a:prstGeom>
           <a:solidFill>
-            <a:srgbClr val="F7F7F7"/>
+            <a:srgbClr val="FFFFFF"/>
           </a:solidFill>
           <a:ln>
             <a:noFill/>
@@ -4999,7 +4903,7 @@
             <a:avLst/>
           </a:prstGeom>
           <a:solidFill>
-            <a:srgbClr val="00A699"/>
+            <a:srgbClr val="6B7BF7"/>
           </a:solidFill>
           <a:ln>
             <a:noFill/>
@@ -5038,7 +4942,7 @@
         <p:spPr>
           <a:xfrm>
             <a:off x="6446520" y="4727448"/>
-            <a:ext cx="4846320" cy="457200"/>
+            <a:ext cx="4846320" cy="386965"/>
           </a:xfrm>
           <a:prstGeom prst="rect">
             <a:avLst/>
@@ -5063,13 +4967,13 @@
               </a:spcAft>
             </a:pPr>
             <a:r>
-              <a:rPr sz="1900" b="1" i="0">
-                <a:solidFill>
-                  <a:srgbClr val="00A699"/>
+              <a:rPr lang="en-US" sz="1900" b="1" i="0">
+                <a:solidFill>
+                  <a:srgbClr val="6B7BF7"/>
                 </a:solidFill>
                 <a:latin typeface="Calibri"/>
               </a:rPr>
-              <a:t>3  Act</a:t>
+              <a:t>Catch Up</a:t>
             </a:r>
           </a:p>
         </p:txBody>
@@ -5083,7 +4987,7 @@
         <p:spPr>
           <a:xfrm>
             <a:off x="6446520" y="5129784"/>
-            <a:ext cx="4937760" cy="457200"/>
+            <a:ext cx="4937760" cy="535531"/>
           </a:xfrm>
           <a:prstGeom prst="rect">
             <a:avLst/>
@@ -5108,17 +5012,41 @@
               </a:spcAft>
             </a:pPr>
             <a:r>
-              <a:rPr sz="1400" b="0" i="0">
-                <a:solidFill>
-                  <a:srgbClr val="767676"/>
+              <a:rPr lang="en-US" sz="1400" b="0" i="0" dirty="0">
+                <a:solidFill>
+                  <a:srgbClr val="6B7280"/>
                 </a:solidFill>
                 <a:latin typeface="Calibri"/>
               </a:rPr>
-              <a:t>Get one dashboard: timeline, decisions, and next actions.</a:t>
-            </a:r>
-          </a:p>
-        </p:txBody>
-      </p:sp>
+              <a:t>One digest of what changed, a live action board, everything editable inline</a:t>
+            </a:r>
+          </a:p>
+        </p:txBody>
+      </p:sp>
+      <p:pic>
+        <p:nvPicPr>
+          <p:cNvPr id="60" name="Solution Visual"/>
+          <p:cNvPicPr>
+            <a:picLocks noChangeAspect="1"/>
+          </p:cNvPicPr>
+          <p:nvPr/>
+        </p:nvPicPr>
+        <p:blipFill>
+          <a:blip r:embed="rId2"/>
+          <a:stretch>
+            <a:fillRect/>
+          </a:stretch>
+        </p:blipFill>
+        <p:spPr>
+          <a:xfrm>
+            <a:off x="838200" y="2491103"/>
+            <a:ext cx="4572000" cy="2881633"/>
+          </a:xfrm>
+          <a:prstGeom prst="rect">
+            <a:avLst/>
+          </a:prstGeom>
+        </p:spPr>
+      </p:pic>
     </p:spTree>
   </p:cSld>
   <p:clrMapOvr>
@@ -5130,11 +5058,645 @@
 <file path=ppt/slides/slide4.xml><?xml version="1.0" encoding="utf-8"?>
 <p:sld xmlns:a="http://schemas.openxmlformats.org/drawingml/2006/main" xmlns:r="http://schemas.openxmlformats.org/officeDocument/2006/relationships" xmlns:p="http://schemas.openxmlformats.org/presentationml/2006/main">
   <p:cSld>
+    <p:spTree>
+      <p:nvGrpSpPr>
+        <p:cNvPr id="1" name=""/>
+        <p:cNvGrpSpPr/>
+        <p:nvPr/>
+      </p:nvGrpSpPr>
+      <p:grpSpPr>
+        <a:xfrm>
+          <a:off x="0" y="0"/>
+          <a:ext cx="0" cy="0"/>
+          <a:chOff x="0" y="0"/>
+          <a:chExt cx="0" cy="0"/>
+        </a:xfrm>
+      </p:grpSpPr>
+      <p:sp>
+        <p:nvSpPr>
+          <p:cNvPr id="2" name="Title 1">
+            <a:extLst>
+              <a:ext uri="{FF2B5EF4-FFF2-40B4-BE49-F238E27FC236}">
+                <a16:creationId xmlns:a16="http://schemas.microsoft.com/office/drawing/2014/main" id="{A6E94F78-2325-86D5-9539-48585AC42376}"/>
+              </a:ext>
+            </a:extLst>
+          </p:cNvPr>
+          <p:cNvSpPr>
+            <a:spLocks noGrp="1"/>
+          </p:cNvSpPr>
+          <p:nvPr>
+            <p:ph type="title"/>
+          </p:nvPr>
+        </p:nvSpPr>
+        <p:spPr>
+          <a:xfrm>
+            <a:off x="640080" y="384048"/>
+            <a:ext cx="10972800" cy="594360"/>
+          </a:xfrm>
+        </p:spPr>
+        <p:txBody>
+          <a:bodyPr/>
+          <a:lstStyle/>
+          <a:p>
+            <a:pPr algn="l">
+              <a:defRPr sz="3100" b="1">
+                <a:solidFill>
+                  <a:srgbClr val="111827"/>
+                </a:solidFill>
+                <a:latin typeface="Aptos Display"/>
+              </a:defRPr>
+            </a:pPr>
+            <a:r>
+              <a:t>Market Validation</a:t>
+            </a:r>
+          </a:p>
+        </p:txBody>
+      </p:sp>
+      <p:sp>
+        <p:nvSpPr>
+          <p:cNvPr id="3" name="TextBox 2"/>
+          <p:cNvSpPr txBox="1"/>
+          <p:nvPr/>
+        </p:nvSpPr>
+        <p:spPr>
+          <a:xfrm>
+            <a:off x="658368" y="1008626"/>
+            <a:ext cx="10789920" cy="369332"/>
+          </a:xfrm>
+          <a:prstGeom prst="rect">
+            <a:avLst/>
+          </a:prstGeom>
+          <a:noFill/>
+        </p:spPr>
+        <p:txBody>
+          <a:bodyPr wrap="square" anchor="ctr">
+            <a:spAutoFit/>
+          </a:bodyPr>
+          <a:lstStyle/>
+          <a:p>
+            <a:pPr algn="l">
+              <a:defRPr sz="1800" b="0">
+                <a:solidFill>
+                  <a:srgbClr val="5C677A"/>
+                </a:solidFill>
+                <a:latin typeface="Aptos"/>
+              </a:defRPr>
+            </a:pPr>
+            <a:r>
+              <a:rPr dirty="0"/>
+              <a:t>People already want AI to help them catch up</a:t>
+            </a:r>
+          </a:p>
+        </p:txBody>
+      </p:sp>
+      <p:sp>
+        <p:nvSpPr>
+          <p:cNvPr id="4" name="Rounded Rectangle 3"/>
+          <p:cNvSpPr/>
+          <p:nvPr/>
+        </p:nvSpPr>
+        <p:spPr>
+          <a:xfrm>
+            <a:off x="1325880" y="1572768"/>
+            <a:ext cx="9555480" cy="2148840"/>
+          </a:xfrm>
+          <a:prstGeom prst="roundRect">
+            <a:avLst/>
+          </a:prstGeom>
+          <a:solidFill>
+            <a:srgbClr val="F4F7FF"/>
+          </a:solidFill>
+          <a:ln w="12700">
+            <a:solidFill>
+              <a:srgbClr val="DEE4EF"/>
+            </a:solidFill>
+          </a:ln>
+        </p:spPr>
+        <p:style>
+          <a:lnRef idx="1">
+            <a:schemeClr val="accent1"/>
+          </a:lnRef>
+          <a:fillRef idx="3">
+            <a:schemeClr val="accent1"/>
+          </a:fillRef>
+          <a:effectRef idx="2">
+            <a:schemeClr val="accent1"/>
+          </a:effectRef>
+          <a:fontRef idx="minor">
+            <a:schemeClr val="lt1"/>
+          </a:fontRef>
+        </p:style>
+        <p:txBody>
+          <a:bodyPr rtlCol="0" anchor="ctr"/>
+          <a:lstStyle/>
+          <a:p>
+            <a:pPr algn="ctr"/>
+            <a:endParaRPr/>
+          </a:p>
+        </p:txBody>
+      </p:sp>
+      <p:sp>
+        <p:nvSpPr>
+          <p:cNvPr id="5" name="TextBox 4"/>
+          <p:cNvSpPr txBox="1"/>
+          <p:nvPr/>
+        </p:nvSpPr>
+        <p:spPr>
+          <a:xfrm>
+            <a:off x="1645920" y="1755648"/>
+            <a:ext cx="8915400" cy="658368"/>
+          </a:xfrm>
+          <a:prstGeom prst="rect">
+            <a:avLst/>
+          </a:prstGeom>
+          <a:noFill/>
+        </p:spPr>
+        <p:txBody>
+          <a:bodyPr wrap="square" anchor="ctr">
+            <a:spAutoFit/>
+          </a:bodyPr>
+          <a:lstStyle/>
+          <a:p>
+            <a:pPr algn="ctr">
+              <a:defRPr sz="4200" b="1">
+                <a:solidFill>
+                  <a:srgbClr val="4361EE"/>
+                </a:solidFill>
+                <a:latin typeface="Aptos"/>
+              </a:defRPr>
+            </a:pPr>
+            <a:r>
+              <a:t>86%</a:t>
+            </a:r>
+          </a:p>
+        </p:txBody>
+      </p:sp>
+      <p:sp>
+        <p:nvSpPr>
+          <p:cNvPr id="6" name="TextBox 5"/>
+          <p:cNvSpPr txBox="1"/>
+          <p:nvPr/>
+        </p:nvSpPr>
+        <p:spPr>
+          <a:xfrm>
+            <a:off x="2057400" y="2441448"/>
+            <a:ext cx="8092440" cy="749808"/>
+          </a:xfrm>
+          <a:prstGeom prst="rect">
+            <a:avLst/>
+          </a:prstGeom>
+          <a:noFill/>
+        </p:spPr>
+        <p:txBody>
+          <a:bodyPr wrap="square" anchor="ctr">
+            <a:spAutoFit/>
+          </a:bodyPr>
+          <a:lstStyle/>
+          <a:p>
+            <a:pPr algn="ctr">
+              <a:defRPr sz="1800" b="1">
+                <a:solidFill>
+                  <a:srgbClr val="111827"/>
+                </a:solidFill>
+                <a:latin typeface="Aptos"/>
+              </a:defRPr>
+            </a:pPr>
+            <a:r>
+              <a:t>of early Microsoft 365 Copilot users said Copilot made it easier to</a:t>
+            </a:r>
+            <a:br/>
+            <a:r>
+              <a:t>catch up on what they missed</a:t>
+            </a:r>
+          </a:p>
+        </p:txBody>
+      </p:sp>
+      <p:sp>
+        <p:nvSpPr>
+          <p:cNvPr id="7" name="TextBox 6"/>
+          <p:cNvSpPr txBox="1"/>
+          <p:nvPr/>
+        </p:nvSpPr>
+        <p:spPr>
+          <a:xfrm>
+            <a:off x="2423160" y="3246120"/>
+            <a:ext cx="7360920" cy="274320"/>
+          </a:xfrm>
+          <a:prstGeom prst="rect">
+            <a:avLst/>
+          </a:prstGeom>
+          <a:noFill/>
+        </p:spPr>
+        <p:txBody>
+          <a:bodyPr wrap="square" anchor="ctr">
+            <a:spAutoFit/>
+          </a:bodyPr>
+          <a:lstStyle/>
+          <a:p>
+            <a:pPr algn="ctr">
+              <a:defRPr sz="1150" b="0">
+                <a:solidFill>
+                  <a:srgbClr val="5C677A"/>
+                </a:solidFill>
+                <a:latin typeface="Aptos"/>
+              </a:defRPr>
+            </a:pPr>
+            <a:r>
+              <a:rPr dirty="0"/>
+              <a:t>Survey of 297 Microsoft 365 Copilot Early Access users</a:t>
+            </a:r>
+          </a:p>
+        </p:txBody>
+      </p:sp>
+      <p:sp>
+        <p:nvSpPr>
+          <p:cNvPr id="8" name="TextBox 7"/>
+          <p:cNvSpPr txBox="1"/>
+          <p:nvPr/>
+        </p:nvSpPr>
+        <p:spPr>
+          <a:xfrm>
+            <a:off x="658368" y="4005072"/>
+            <a:ext cx="10789920" cy="320040"/>
+          </a:xfrm>
+          <a:prstGeom prst="rect">
+            <a:avLst/>
+          </a:prstGeom>
+          <a:noFill/>
+        </p:spPr>
+        <p:txBody>
+          <a:bodyPr wrap="square" anchor="ctr">
+            <a:spAutoFit/>
+          </a:bodyPr>
+          <a:lstStyle/>
+          <a:p>
+            <a:pPr algn="ctr">
+              <a:defRPr sz="1050" b="1">
+                <a:solidFill>
+                  <a:srgbClr val="4361EE"/>
+                </a:solidFill>
+                <a:latin typeface="Aptos"/>
+              </a:defRPr>
+            </a:pPr>
+            <a:r>
+              <a:t>THREADLINE FOCUSES THAT NEED ON PROJECT MEMORY</a:t>
+            </a:r>
+          </a:p>
+        </p:txBody>
+      </p:sp>
+      <p:sp>
+        <p:nvSpPr>
+          <p:cNvPr id="9" name="Rounded Rectangle 8"/>
+          <p:cNvSpPr/>
+          <p:nvPr/>
+        </p:nvSpPr>
+        <p:spPr>
+          <a:xfrm>
+            <a:off x="1417320" y="4498848"/>
+            <a:ext cx="2697480" cy="713232"/>
+          </a:xfrm>
+          <a:prstGeom prst="roundRect">
+            <a:avLst/>
+          </a:prstGeom>
+          <a:solidFill>
+            <a:srgbClr val="FFFFFF"/>
+          </a:solidFill>
+          <a:ln>
+            <a:solidFill>
+              <a:srgbClr val="DEE4EF"/>
+            </a:solidFill>
+          </a:ln>
+        </p:spPr>
+        <p:style>
+          <a:lnRef idx="1">
+            <a:schemeClr val="accent1"/>
+          </a:lnRef>
+          <a:fillRef idx="3">
+            <a:schemeClr val="accent1"/>
+          </a:fillRef>
+          <a:effectRef idx="2">
+            <a:schemeClr val="accent1"/>
+          </a:effectRef>
+          <a:fontRef idx="minor">
+            <a:schemeClr val="lt1"/>
+          </a:fontRef>
+        </p:style>
+        <p:txBody>
+          <a:bodyPr rtlCol="0" anchor="ctr"/>
+          <a:lstStyle/>
+          <a:p>
+            <a:pPr algn="ctr"/>
+            <a:endParaRPr/>
+          </a:p>
+        </p:txBody>
+      </p:sp>
+      <p:sp>
+        <p:nvSpPr>
+          <p:cNvPr id="10" name="TextBox 9"/>
+          <p:cNvSpPr txBox="1"/>
+          <p:nvPr/>
+        </p:nvSpPr>
+        <p:spPr>
+          <a:xfrm>
+            <a:off x="1490472" y="4608576"/>
+            <a:ext cx="2551176" cy="457200"/>
+          </a:xfrm>
+          <a:prstGeom prst="rect">
+            <a:avLst/>
+          </a:prstGeom>
+          <a:noFill/>
+        </p:spPr>
+        <p:txBody>
+          <a:bodyPr wrap="square" anchor="ctr">
+            <a:spAutoFit/>
+          </a:bodyPr>
+          <a:lstStyle/>
+          <a:p>
+            <a:pPr algn="ctr">
+              <a:defRPr sz="1450" b="1">
+                <a:solidFill>
+                  <a:srgbClr val="111827"/>
+                </a:solidFill>
+                <a:latin typeface="Aptos"/>
+              </a:defRPr>
+            </a:pPr>
+            <a:r>
+              <a:t>What changed?</a:t>
+            </a:r>
+          </a:p>
+        </p:txBody>
+      </p:sp>
+      <p:sp>
+        <p:nvSpPr>
+          <p:cNvPr id="11" name="Rounded Rectangle 10"/>
+          <p:cNvSpPr/>
+          <p:nvPr/>
+        </p:nvSpPr>
+        <p:spPr>
+          <a:xfrm>
+            <a:off x="4434840" y="4498848"/>
+            <a:ext cx="2697480" cy="713232"/>
+          </a:xfrm>
+          <a:prstGeom prst="roundRect">
+            <a:avLst/>
+          </a:prstGeom>
+          <a:solidFill>
+            <a:srgbClr val="FFFFFF"/>
+          </a:solidFill>
+          <a:ln>
+            <a:solidFill>
+              <a:srgbClr val="DEE4EF"/>
+            </a:solidFill>
+          </a:ln>
+        </p:spPr>
+        <p:style>
+          <a:lnRef idx="1">
+            <a:schemeClr val="accent1"/>
+          </a:lnRef>
+          <a:fillRef idx="3">
+            <a:schemeClr val="accent1"/>
+          </a:fillRef>
+          <a:effectRef idx="2">
+            <a:schemeClr val="accent1"/>
+          </a:effectRef>
+          <a:fontRef idx="minor">
+            <a:schemeClr val="lt1"/>
+          </a:fontRef>
+        </p:style>
+        <p:txBody>
+          <a:bodyPr rtlCol="0" anchor="ctr"/>
+          <a:lstStyle/>
+          <a:p>
+            <a:pPr algn="ctr"/>
+            <a:endParaRPr/>
+          </a:p>
+        </p:txBody>
+      </p:sp>
+      <p:sp>
+        <p:nvSpPr>
+          <p:cNvPr id="12" name="TextBox 11"/>
+          <p:cNvSpPr txBox="1"/>
+          <p:nvPr/>
+        </p:nvSpPr>
+        <p:spPr>
+          <a:xfrm>
+            <a:off x="4507992" y="4679440"/>
+            <a:ext cx="2551176" cy="315471"/>
+          </a:xfrm>
+          <a:prstGeom prst="rect">
+            <a:avLst/>
+          </a:prstGeom>
+          <a:noFill/>
+        </p:spPr>
+        <p:txBody>
+          <a:bodyPr wrap="square" anchor="ctr">
+            <a:spAutoFit/>
+          </a:bodyPr>
+          <a:lstStyle/>
+          <a:p>
+            <a:pPr algn="ctr">
+              <a:defRPr sz="1450" b="1">
+                <a:solidFill>
+                  <a:srgbClr val="111827"/>
+                </a:solidFill>
+                <a:latin typeface="Aptos"/>
+              </a:defRPr>
+            </a:pPr>
+            <a:r>
+              <a:rPr lang="en-US" dirty="0"/>
+              <a:t>When was it changed?</a:t>
+            </a:r>
+            <a:endParaRPr dirty="0"/>
+          </a:p>
+        </p:txBody>
+      </p:sp>
+      <p:sp>
+        <p:nvSpPr>
+          <p:cNvPr id="13" name="Rounded Rectangle 12"/>
+          <p:cNvSpPr/>
+          <p:nvPr/>
+        </p:nvSpPr>
+        <p:spPr>
+          <a:xfrm>
+            <a:off x="7635240" y="4498848"/>
+            <a:ext cx="2697480" cy="713232"/>
+          </a:xfrm>
+          <a:prstGeom prst="roundRect">
+            <a:avLst/>
+          </a:prstGeom>
+          <a:solidFill>
+            <a:srgbClr val="FFFFFF"/>
+          </a:solidFill>
+          <a:ln>
+            <a:solidFill>
+              <a:srgbClr val="DEE4EF"/>
+            </a:solidFill>
+          </a:ln>
+        </p:spPr>
+        <p:style>
+          <a:lnRef idx="1">
+            <a:schemeClr val="accent1"/>
+          </a:lnRef>
+          <a:fillRef idx="3">
+            <a:schemeClr val="accent1"/>
+          </a:fillRef>
+          <a:effectRef idx="2">
+            <a:schemeClr val="accent1"/>
+          </a:effectRef>
+          <a:fontRef idx="minor">
+            <a:schemeClr val="lt1"/>
+          </a:fontRef>
+        </p:style>
+        <p:txBody>
+          <a:bodyPr rtlCol="0" anchor="ctr"/>
+          <a:lstStyle/>
+          <a:p>
+            <a:pPr algn="ctr"/>
+            <a:endParaRPr/>
+          </a:p>
+        </p:txBody>
+      </p:sp>
+      <p:sp>
+        <p:nvSpPr>
+          <p:cNvPr id="14" name="TextBox 13"/>
+          <p:cNvSpPr txBox="1"/>
+          <p:nvPr/>
+        </p:nvSpPr>
+        <p:spPr>
+          <a:xfrm>
+            <a:off x="7708392" y="4608576"/>
+            <a:ext cx="2551176" cy="457200"/>
+          </a:xfrm>
+          <a:prstGeom prst="rect">
+            <a:avLst/>
+          </a:prstGeom>
+          <a:noFill/>
+        </p:spPr>
+        <p:txBody>
+          <a:bodyPr wrap="square" anchor="ctr">
+            <a:spAutoFit/>
+          </a:bodyPr>
+          <a:lstStyle/>
+          <a:p>
+            <a:pPr algn="ctr">
+              <a:defRPr sz="1450" b="1">
+                <a:solidFill>
+                  <a:srgbClr val="111827"/>
+                </a:solidFill>
+                <a:latin typeface="Aptos"/>
+              </a:defRPr>
+            </a:pPr>
+            <a:r>
+              <a:t>What needs my attention?</a:t>
+            </a:r>
+          </a:p>
+        </p:txBody>
+      </p:sp>
+      <p:sp>
+        <p:nvSpPr>
+          <p:cNvPr id="15" name="TextBox 14"/>
+          <p:cNvSpPr txBox="1"/>
+          <p:nvPr/>
+        </p:nvSpPr>
+        <p:spPr>
+          <a:xfrm>
+            <a:off x="658368" y="5513832"/>
+            <a:ext cx="10789920" cy="274320"/>
+          </a:xfrm>
+          <a:prstGeom prst="rect">
+            <a:avLst/>
+          </a:prstGeom>
+          <a:noFill/>
+        </p:spPr>
+        <p:txBody>
+          <a:bodyPr wrap="square" anchor="ctr">
+            <a:spAutoFit/>
+          </a:bodyPr>
+          <a:lstStyle/>
+          <a:p>
+            <a:pPr algn="l">
+              <a:defRPr sz="1050" b="0">
+                <a:solidFill>
+                  <a:srgbClr val="5C677A"/>
+                </a:solidFill>
+                <a:latin typeface="Aptos"/>
+              </a:defRPr>
+            </a:pPr>
+            <a:r>
+              <a:rPr dirty="0"/>
+              <a:t>Source: Microsoft Work Trend Index, 2023 · 297 Copilot Early Access users</a:t>
+            </a:r>
+          </a:p>
+        </p:txBody>
+      </p:sp>
+      <p:sp>
+        <p:nvSpPr>
+          <p:cNvPr id="16" name="TextBox 15"/>
+          <p:cNvSpPr txBox="1"/>
+          <p:nvPr/>
+        </p:nvSpPr>
+        <p:spPr>
+          <a:xfrm>
+            <a:off x="658368" y="5843016"/>
+            <a:ext cx="10789920" cy="329184"/>
+          </a:xfrm>
+          <a:prstGeom prst="rect">
+            <a:avLst/>
+          </a:prstGeom>
+          <a:noFill/>
+        </p:spPr>
+        <p:txBody>
+          <a:bodyPr wrap="square" anchor="ctr">
+            <a:spAutoFit/>
+          </a:bodyPr>
+          <a:lstStyle/>
+          <a:p>
+            <a:pPr algn="l">
+              <a:defRPr sz="950" b="0">
+                <a:solidFill>
+                  <a:srgbClr val="4361EE"/>
+                </a:solidFill>
+                <a:latin typeface="Aptos"/>
+              </a:defRPr>
+            </a:pPr>
+            <a:r>
+              <a:t>Verify: microsoft.com/worklab/work-trend-index/copilots-earliest-users-teach-us-about-generative-ai-at-work</a:t>
+            </a:r>
+          </a:p>
+        </p:txBody>
+      </p:sp>
+    </p:spTree>
+    <p:extLst>
+      <p:ext uri="{BB962C8B-B14F-4D97-AF65-F5344CB8AC3E}">
+        <p14:creationId xmlns:p14="http://schemas.microsoft.com/office/powerpoint/2010/main" val="3175636885"/>
+      </p:ext>
+    </p:extLst>
+  </p:cSld>
+  <p:clrMapOvr>
+    <a:masterClrMapping/>
+  </p:clrMapOvr>
+</p:sld>
+</file>
+
+<file path=ppt/slides/slide5.xml><?xml version="1.0" encoding="utf-8"?>
+<p:sld xmlns:a="http://schemas.openxmlformats.org/drawingml/2006/main" xmlns:r="http://schemas.openxmlformats.org/officeDocument/2006/relationships" xmlns:p="http://schemas.openxmlformats.org/presentationml/2006/main">
+  <p:cSld>
     <p:bg>
       <p:bgPr>
-        <a:solidFill>
-          <a:srgbClr val="FFFFFF"/>
-        </a:solidFill>
+        <a:gradFill rotWithShape="1">
+          <a:gsLst>
+            <a:gs pos="0">
+              <a:srgbClr val="FFFFFF"/>
+            </a:gs>
+            <a:gs pos="55000">
+              <a:srgbClr val="F6F7FE"/>
+            </a:gs>
+            <a:gs pos="100000">
+              <a:srgbClr val="E8EBFC"/>
+            </a:gs>
+          </a:gsLst>
+          <a:lin ang="2700000" scaled="0"/>
+        </a:gradFill>
         <a:effectLst/>
       </p:bgPr>
     </p:bg>
@@ -5154,6 +5716,97 @@
       </p:grpSpPr>
       <p:sp>
         <p:nvSpPr>
+          <p:cNvPr id="40" name="Accent Blob 1"/>
+          <p:cNvSpPr/>
+          <p:nvPr/>
+        </p:nvSpPr>
+        <p:spPr>
+          <a:xfrm>
+            <a:off x="10100000" y="-1500000"/>
+            <a:ext cx="3600000" cy="3600000"/>
+          </a:xfrm>
+          <a:prstGeom prst="ellipse">
+            <a:avLst/>
+          </a:prstGeom>
+          <a:solidFill>
+            <a:srgbClr val="6B7BF7">
+              <a:alpha val="9000"/>
+            </a:srgbClr>
+          </a:solidFill>
+          <a:ln>
+            <a:noFill/>
+          </a:ln>
+        </p:spPr>
+        <p:txBody>
+          <a:bodyPr/>
+          <a:lstStyle/>
+          <a:p>
+            <a:endParaRPr lang="en-US"/>
+          </a:p>
+        </p:txBody>
+      </p:sp>
+      <p:sp>
+        <p:nvSpPr>
+          <p:cNvPr id="41" name="Accent Blob 2"/>
+          <p:cNvSpPr/>
+          <p:nvPr/>
+        </p:nvSpPr>
+        <p:spPr>
+          <a:xfrm>
+            <a:off x="-1600000" y="4900000"/>
+            <a:ext cx="3000000" cy="3000000"/>
+          </a:xfrm>
+          <a:prstGeom prst="ellipse">
+            <a:avLst/>
+          </a:prstGeom>
+          <a:solidFill>
+            <a:srgbClr val="6B7BF7">
+              <a:alpha val="7000"/>
+            </a:srgbClr>
+          </a:solidFill>
+          <a:ln>
+            <a:noFill/>
+          </a:ln>
+        </p:spPr>
+        <p:txBody>
+          <a:bodyPr/>
+          <a:lstStyle/>
+          <a:p>
+            <a:endParaRPr lang="en-US"/>
+          </a:p>
+        </p:txBody>
+      </p:sp>
+      <p:sp>
+        <p:nvSpPr>
+          <p:cNvPr id="42" name="Tech Card"/>
+          <p:cNvSpPr/>
+          <p:nvPr/>
+        </p:nvSpPr>
+        <p:spPr>
+          <a:xfrm>
+            <a:off x="8783031" y="2153609"/>
+            <a:ext cx="2633937" cy="3029928"/>
+          </a:xfrm>
+          <a:prstGeom prst="rect">
+            <a:avLst/>
+          </a:prstGeom>
+          <a:solidFill>
+            <a:srgbClr val="FFFFFF"/>
+          </a:solidFill>
+          <a:ln>
+            <a:noFill/>
+          </a:ln>
+        </p:spPr>
+        <p:txBody>
+          <a:bodyPr/>
+          <a:lstStyle/>
+          <a:p>
+            <a:endParaRPr lang="en-US"/>
+          </a:p>
+        </p:txBody>
+      </p:sp>
+      <p:sp>
+        <p:nvSpPr>
           <p:cNvPr id="2" name="TextBox 1"/>
           <p:cNvSpPr txBox="1"/>
           <p:nvPr/>
@@ -5161,7 +5814,7 @@
         <p:spPr>
           <a:xfrm>
             <a:off x="640080" y="548640"/>
-            <a:ext cx="3657600" cy="365760"/>
+            <a:ext cx="3657600" cy="293863"/>
           </a:xfrm>
           <a:prstGeom prst="rect">
             <a:avLst/>
@@ -5186,14 +5839,20 @@
               </a:spcAft>
             </a:pPr>
             <a:r>
-              <a:rPr sz="1300" b="1" i="0">
-                <a:solidFill>
-                  <a:srgbClr val="FF5A5F"/>
+              <a:rPr lang="en-US" sz="1300" b="1">
+                <a:solidFill>
+                  <a:srgbClr val="6B7BF7"/>
                 </a:solidFill>
                 <a:latin typeface="Calibri"/>
               </a:rPr>
-              <a:t>MARKET &amp; MODEL</a:t>
-            </a:r>
+              <a:t>Real Pipeline, Real Data</a:t>
+            </a:r>
+            <a:endParaRPr lang="en-US" sz="1300" b="1" i="0">
+              <a:solidFill>
+                <a:srgbClr val="6B7BF7"/>
+              </a:solidFill>
+              <a:latin typeface="Calibri"/>
+            </a:endParaRPr>
           </a:p>
         </p:txBody>
       </p:sp>
@@ -5205,8 +5864,8 @@
         </p:nvSpPr>
         <p:spPr>
           <a:xfrm>
-            <a:off x="640080" y="914400"/>
-            <a:ext cx="10972800" cy="1097280"/>
+            <a:off x="640080" y="896112"/>
+            <a:ext cx="10972800" cy="557460"/>
           </a:xfrm>
           <a:prstGeom prst="rect">
             <a:avLst/>
@@ -5231,650 +5890,13 @@
               </a:spcAft>
             </a:pPr>
             <a:r>
-              <a:rPr sz="3000" b="1" i="0">
-                <a:solidFill>
-                  <a:srgbClr val="222222"/>
+              <a:rPr lang="en-US" sz="3000" b="1" i="0">
+                <a:solidFill>
+                  <a:srgbClr val="2F3545"/>
                 </a:solidFill>
                 <a:latin typeface="Calibri"/>
               </a:rPr>
-              <a:t>A large market, a simple way to earn.</a:t>
-            </a:r>
-          </a:p>
-        </p:txBody>
-      </p:sp>
-      <p:sp>
-        <p:nvSpPr>
-          <p:cNvPr id="4" name="Rectangle 3"/>
-          <p:cNvSpPr/>
-          <p:nvPr/>
-        </p:nvSpPr>
-        <p:spPr>
-          <a:xfrm>
-            <a:off x="640080" y="2286000"/>
-            <a:ext cx="5852160" cy="960120"/>
-          </a:xfrm>
-          <a:prstGeom prst="rect">
-            <a:avLst/>
-          </a:prstGeom>
-          <a:solidFill>
-            <a:srgbClr val="FF5A5F"/>
-          </a:solidFill>
-          <a:ln>
-            <a:noFill/>
-          </a:ln>
-          <a:effectLst/>
-        </p:spPr>
-        <p:style>
-          <a:lnRef idx="1">
-            <a:schemeClr val="accent1"/>
-          </a:lnRef>
-          <a:fillRef idx="3">
-            <a:schemeClr val="accent1"/>
-          </a:fillRef>
-          <a:effectRef idx="2">
-            <a:schemeClr val="accent1"/>
-          </a:effectRef>
-          <a:fontRef idx="minor">
-            <a:schemeClr val="lt1"/>
-          </a:fontRef>
-        </p:style>
-        <p:txBody>
-          <a:bodyPr rtlCol="0" anchor="ctr"/>
-          <a:lstStyle/>
-          <a:p>
-            <a:pPr algn="ctr"/>
-            <a:endParaRPr/>
-          </a:p>
-        </p:txBody>
-      </p:sp>
-      <p:sp>
-        <p:nvSpPr>
-          <p:cNvPr id="5" name="TextBox 4"/>
-          <p:cNvSpPr txBox="1"/>
-          <p:nvPr/>
-        </p:nvSpPr>
-        <p:spPr>
-          <a:xfrm>
-            <a:off x="914400" y="2359152"/>
-            <a:ext cx="2011680" cy="822960"/>
-          </a:xfrm>
-          <a:prstGeom prst="rect">
-            <a:avLst/>
-          </a:prstGeom>
-          <a:noFill/>
-        </p:spPr>
-        <p:txBody>
-          <a:bodyPr wrap="square" anchor="t">
-            <a:spAutoFit/>
-          </a:bodyPr>
-          <a:lstStyle/>
-          <a:p>
-            <a:pPr algn="l">
-              <a:lnSpc>
-                <a:spcPct val="105000"/>
-              </a:lnSpc>
-              <a:spcBef>
-                <a:spcPts val="0"/>
-              </a:spcBef>
-              <a:spcAft>
-                <a:spcPts val="0"/>
-              </a:spcAft>
-            </a:pPr>
-            <a:r>
-              <a:rPr sz="2600" b="1" i="0">
-                <a:solidFill>
-                  <a:srgbClr val="FFFFFF"/>
-                </a:solidFill>
-                <a:latin typeface="Calibri"/>
-              </a:rPr>
-              <a:t>$100B+</a:t>
-            </a:r>
-          </a:p>
-          <a:p>
-            <a:pPr algn="l">
-              <a:lnSpc>
-                <a:spcPct val="105000"/>
-              </a:lnSpc>
-              <a:spcBef>
-                <a:spcPts val="0"/>
-              </a:spcBef>
-              <a:spcAft>
-                <a:spcPts val="0"/>
-              </a:spcAft>
-            </a:pPr>
-            <a:r>
-              <a:rPr sz="1200" b="1" i="0">
-                <a:solidFill>
-                  <a:srgbClr val="FFFFFF"/>
-                </a:solidFill>
-                <a:latin typeface="Calibri"/>
-              </a:rPr>
-              <a:t>TAM</a:t>
-            </a:r>
-          </a:p>
-        </p:txBody>
-      </p:sp>
-      <p:sp>
-        <p:nvSpPr>
-          <p:cNvPr id="6" name="TextBox 5"/>
-          <p:cNvSpPr txBox="1"/>
-          <p:nvPr/>
-        </p:nvSpPr>
-        <p:spPr>
-          <a:xfrm>
-            <a:off x="6720840" y="2542032"/>
-            <a:ext cx="5486400" cy="640080"/>
-          </a:xfrm>
-          <a:prstGeom prst="rect">
-            <a:avLst/>
-          </a:prstGeom>
-          <a:noFill/>
-        </p:spPr>
-        <p:txBody>
-          <a:bodyPr wrap="square" anchor="t">
-            <a:spAutoFit/>
-          </a:bodyPr>
-          <a:lstStyle/>
-          <a:p>
-            <a:pPr algn="l">
-              <a:lnSpc>
-                <a:spcPct val="105000"/>
-              </a:lnSpc>
-              <a:spcBef>
-                <a:spcPts val="0"/>
-              </a:spcBef>
-              <a:spcAft>
-                <a:spcPts val="600"/>
-              </a:spcAft>
-            </a:pPr>
-            <a:r>
-              <a:rPr sz="1400" b="0" i="0">
-                <a:solidFill>
-                  <a:srgbClr val="767676"/>
-                </a:solidFill>
-                <a:latin typeface="Calibri"/>
-              </a:rPr>
-              <a:t>Global project &amp; work-management software</a:t>
-            </a:r>
-          </a:p>
-        </p:txBody>
-      </p:sp>
-      <p:sp>
-        <p:nvSpPr>
-          <p:cNvPr id="7" name="Rectangle 6"/>
-          <p:cNvSpPr/>
-          <p:nvPr/>
-        </p:nvSpPr>
-        <p:spPr>
-          <a:xfrm>
-            <a:off x="640080" y="3429000"/>
-            <a:ext cx="4480560" cy="960120"/>
-          </a:xfrm>
-          <a:prstGeom prst="rect">
-            <a:avLst/>
-          </a:prstGeom>
-          <a:solidFill>
-            <a:srgbClr val="FF7B7F"/>
-          </a:solidFill>
-          <a:ln>
-            <a:noFill/>
-          </a:ln>
-          <a:effectLst/>
-        </p:spPr>
-        <p:style>
-          <a:lnRef idx="1">
-            <a:schemeClr val="accent1"/>
-          </a:lnRef>
-          <a:fillRef idx="3">
-            <a:schemeClr val="accent1"/>
-          </a:fillRef>
-          <a:effectRef idx="2">
-            <a:schemeClr val="accent1"/>
-          </a:effectRef>
-          <a:fontRef idx="minor">
-            <a:schemeClr val="lt1"/>
-          </a:fontRef>
-        </p:style>
-        <p:txBody>
-          <a:bodyPr rtlCol="0" anchor="ctr"/>
-          <a:lstStyle/>
-          <a:p>
-            <a:pPr algn="ctr"/>
-            <a:endParaRPr/>
-          </a:p>
-        </p:txBody>
-      </p:sp>
-      <p:sp>
-        <p:nvSpPr>
-          <p:cNvPr id="8" name="TextBox 7"/>
-          <p:cNvSpPr txBox="1"/>
-          <p:nvPr/>
-        </p:nvSpPr>
-        <p:spPr>
-          <a:xfrm>
-            <a:off x="914400" y="3502152"/>
-            <a:ext cx="2011680" cy="822960"/>
-          </a:xfrm>
-          <a:prstGeom prst="rect">
-            <a:avLst/>
-          </a:prstGeom>
-          <a:noFill/>
-        </p:spPr>
-        <p:txBody>
-          <a:bodyPr wrap="square" anchor="t">
-            <a:spAutoFit/>
-          </a:bodyPr>
-          <a:lstStyle/>
-          <a:p>
-            <a:pPr algn="l">
-              <a:lnSpc>
-                <a:spcPct val="105000"/>
-              </a:lnSpc>
-              <a:spcBef>
-                <a:spcPts val="0"/>
-              </a:spcBef>
-              <a:spcAft>
-                <a:spcPts val="0"/>
-              </a:spcAft>
-            </a:pPr>
-            <a:r>
-              <a:rPr sz="2600" b="1" i="0">
-                <a:solidFill>
-                  <a:srgbClr val="FFFFFF"/>
-                </a:solidFill>
-                <a:latin typeface="Calibri"/>
-              </a:rPr>
-              <a:t>$18B</a:t>
-            </a:r>
-          </a:p>
-          <a:p>
-            <a:pPr algn="l">
-              <a:lnSpc>
-                <a:spcPct val="105000"/>
-              </a:lnSpc>
-              <a:spcBef>
-                <a:spcPts val="0"/>
-              </a:spcBef>
-              <a:spcAft>
-                <a:spcPts val="0"/>
-              </a:spcAft>
-            </a:pPr>
-            <a:r>
-              <a:rPr sz="1200" b="1" i="0">
-                <a:solidFill>
-                  <a:srgbClr val="FFFFFF"/>
-                </a:solidFill>
-                <a:latin typeface="Calibri"/>
-              </a:rPr>
-              <a:t>SAM</a:t>
-            </a:r>
-          </a:p>
-        </p:txBody>
-      </p:sp>
-      <p:sp>
-        <p:nvSpPr>
-          <p:cNvPr id="9" name="TextBox 8"/>
-          <p:cNvSpPr txBox="1"/>
-          <p:nvPr/>
-        </p:nvSpPr>
-        <p:spPr>
-          <a:xfrm>
-            <a:off x="5349240" y="3685032"/>
-            <a:ext cx="5486400" cy="640080"/>
-          </a:xfrm>
-          <a:prstGeom prst="rect">
-            <a:avLst/>
-          </a:prstGeom>
-          <a:noFill/>
-        </p:spPr>
-        <p:txBody>
-          <a:bodyPr wrap="square" anchor="t">
-            <a:spAutoFit/>
-          </a:bodyPr>
-          <a:lstStyle/>
-          <a:p>
-            <a:pPr algn="l">
-              <a:lnSpc>
-                <a:spcPct val="105000"/>
-              </a:lnSpc>
-              <a:spcBef>
-                <a:spcPts val="0"/>
-              </a:spcBef>
-              <a:spcAft>
-                <a:spcPts val="600"/>
-              </a:spcAft>
-            </a:pPr>
-            <a:r>
-              <a:rPr sz="1400" b="0" i="0">
-                <a:solidFill>
-                  <a:srgbClr val="767676"/>
-                </a:solidFill>
-                <a:latin typeface="Calibri"/>
-              </a:rPr>
-              <a:t>Knowledge workers on Gmail / Google Workspace</a:t>
-            </a:r>
-          </a:p>
-        </p:txBody>
-      </p:sp>
-      <p:sp>
-        <p:nvSpPr>
-          <p:cNvPr id="10" name="Rectangle 9"/>
-          <p:cNvSpPr/>
-          <p:nvPr/>
-        </p:nvSpPr>
-        <p:spPr>
-          <a:xfrm>
-            <a:off x="640080" y="4572000"/>
-            <a:ext cx="3108960" cy="960120"/>
-          </a:xfrm>
-          <a:prstGeom prst="rect">
-            <a:avLst/>
-          </a:prstGeom>
-          <a:solidFill>
-            <a:srgbClr val="FF9C9F"/>
-          </a:solidFill>
-          <a:ln>
-            <a:noFill/>
-          </a:ln>
-          <a:effectLst/>
-        </p:spPr>
-        <p:style>
-          <a:lnRef idx="1">
-            <a:schemeClr val="accent1"/>
-          </a:lnRef>
-          <a:fillRef idx="3">
-            <a:schemeClr val="accent1"/>
-          </a:fillRef>
-          <a:effectRef idx="2">
-            <a:schemeClr val="accent1"/>
-          </a:effectRef>
-          <a:fontRef idx="minor">
-            <a:schemeClr val="lt1"/>
-          </a:fontRef>
-        </p:style>
-        <p:txBody>
-          <a:bodyPr rtlCol="0" anchor="ctr"/>
-          <a:lstStyle/>
-          <a:p>
-            <a:pPr algn="ctr"/>
-            <a:endParaRPr/>
-          </a:p>
-        </p:txBody>
-      </p:sp>
-      <p:sp>
-        <p:nvSpPr>
-          <p:cNvPr id="11" name="TextBox 10"/>
-          <p:cNvSpPr txBox="1"/>
-          <p:nvPr/>
-        </p:nvSpPr>
-        <p:spPr>
-          <a:xfrm>
-            <a:off x="914400" y="4645152"/>
-            <a:ext cx="2011680" cy="822960"/>
-          </a:xfrm>
-          <a:prstGeom prst="rect">
-            <a:avLst/>
-          </a:prstGeom>
-          <a:noFill/>
-        </p:spPr>
-        <p:txBody>
-          <a:bodyPr wrap="square" anchor="t">
-            <a:spAutoFit/>
-          </a:bodyPr>
-          <a:lstStyle/>
-          <a:p>
-            <a:pPr algn="l">
-              <a:lnSpc>
-                <a:spcPct val="105000"/>
-              </a:lnSpc>
-              <a:spcBef>
-                <a:spcPts val="0"/>
-              </a:spcBef>
-              <a:spcAft>
-                <a:spcPts val="0"/>
-              </a:spcAft>
-            </a:pPr>
-            <a:r>
-              <a:rPr sz="2600" b="1" i="0">
-                <a:solidFill>
-                  <a:srgbClr val="FFFFFF"/>
-                </a:solidFill>
-                <a:latin typeface="Calibri"/>
-              </a:rPr>
-              <a:t>$400M</a:t>
-            </a:r>
-          </a:p>
-          <a:p>
-            <a:pPr algn="l">
-              <a:lnSpc>
-                <a:spcPct val="105000"/>
-              </a:lnSpc>
-              <a:spcBef>
-                <a:spcPts val="0"/>
-              </a:spcBef>
-              <a:spcAft>
-                <a:spcPts val="0"/>
-              </a:spcAft>
-            </a:pPr>
-            <a:r>
-              <a:rPr sz="1200" b="1" i="0">
-                <a:solidFill>
-                  <a:srgbClr val="FFFFFF"/>
-                </a:solidFill>
-                <a:latin typeface="Calibri"/>
-              </a:rPr>
-              <a:t>SOM</a:t>
-            </a:r>
-          </a:p>
-        </p:txBody>
-      </p:sp>
-      <p:sp>
-        <p:nvSpPr>
-          <p:cNvPr id="12" name="TextBox 11"/>
-          <p:cNvSpPr txBox="1"/>
-          <p:nvPr/>
-        </p:nvSpPr>
-        <p:spPr>
-          <a:xfrm>
-            <a:off x="3977640" y="4828032"/>
-            <a:ext cx="5486400" cy="640080"/>
-          </a:xfrm>
-          <a:prstGeom prst="rect">
-            <a:avLst/>
-          </a:prstGeom>
-          <a:noFill/>
-        </p:spPr>
-        <p:txBody>
-          <a:bodyPr wrap="square" anchor="t">
-            <a:spAutoFit/>
-          </a:bodyPr>
-          <a:lstStyle/>
-          <a:p>
-            <a:pPr algn="l">
-              <a:lnSpc>
-                <a:spcPct val="105000"/>
-              </a:lnSpc>
-              <a:spcBef>
-                <a:spcPts val="0"/>
-              </a:spcBef>
-              <a:spcAft>
-                <a:spcPts val="600"/>
-              </a:spcAft>
-            </a:pPr>
-            <a:r>
-              <a:rPr sz="1400" b="0" i="0">
-                <a:solidFill>
-                  <a:srgbClr val="767676"/>
-                </a:solidFill>
-                <a:latin typeface="Calibri"/>
-              </a:rPr>
-              <a:t>Early target: PMs, consultants &amp; freelancers</a:t>
-            </a:r>
-          </a:p>
-        </p:txBody>
-      </p:sp>
-      <p:sp>
-        <p:nvSpPr>
-          <p:cNvPr id="13" name="Rectangle 12"/>
-          <p:cNvSpPr/>
-          <p:nvPr/>
-        </p:nvSpPr>
-        <p:spPr>
-          <a:xfrm>
-            <a:off x="8275320" y="2286000"/>
-            <a:ext cx="3246120" cy="3474720"/>
-          </a:xfrm>
-          <a:prstGeom prst="rect">
-            <a:avLst/>
-          </a:prstGeom>
-          <a:solidFill>
-            <a:srgbClr val="F7F7F7"/>
-          </a:solidFill>
-          <a:ln>
-            <a:noFill/>
-          </a:ln>
-          <a:effectLst/>
-        </p:spPr>
-        <p:style>
-          <a:lnRef idx="1">
-            <a:schemeClr val="accent1"/>
-          </a:lnRef>
-          <a:fillRef idx="3">
-            <a:schemeClr val="accent1"/>
-          </a:fillRef>
-          <a:effectRef idx="2">
-            <a:schemeClr val="accent1"/>
-          </a:effectRef>
-          <a:fontRef idx="minor">
-            <a:schemeClr val="lt1"/>
-          </a:fontRef>
-        </p:style>
-        <p:txBody>
-          <a:bodyPr rtlCol="0" anchor="ctr"/>
-          <a:lstStyle/>
-          <a:p>
-            <a:pPr algn="ctr"/>
-            <a:endParaRPr/>
-          </a:p>
-        </p:txBody>
-      </p:sp>
-      <p:sp>
-        <p:nvSpPr>
-          <p:cNvPr id="14" name="TextBox 13"/>
-          <p:cNvSpPr txBox="1"/>
-          <p:nvPr/>
-        </p:nvSpPr>
-        <p:spPr>
-          <a:xfrm>
-            <a:off x="8549640" y="2468880"/>
-            <a:ext cx="2743200" cy="457200"/>
-          </a:xfrm>
-          <a:prstGeom prst="rect">
-            <a:avLst/>
-          </a:prstGeom>
-          <a:noFill/>
-        </p:spPr>
-        <p:txBody>
-          <a:bodyPr wrap="square" anchor="t">
-            <a:spAutoFit/>
-          </a:bodyPr>
-          <a:lstStyle/>
-          <a:p>
-            <a:pPr algn="l">
-              <a:lnSpc>
-                <a:spcPct val="105000"/>
-              </a:lnSpc>
-              <a:spcBef>
-                <a:spcPts val="0"/>
-              </a:spcBef>
-              <a:spcAft>
-                <a:spcPts val="600"/>
-              </a:spcAft>
-            </a:pPr>
-            <a:r>
-              <a:rPr sz="1300" b="1" i="0">
-                <a:solidFill>
-                  <a:srgbClr val="FF5A5F"/>
-                </a:solidFill>
-                <a:latin typeface="Calibri"/>
-              </a:rPr>
-              <a:t>BUSINESS MODEL</a:t>
-            </a:r>
-          </a:p>
-        </p:txBody>
-      </p:sp>
-      <p:sp>
-        <p:nvSpPr>
-          <p:cNvPr id="15" name="TextBox 14"/>
-          <p:cNvSpPr txBox="1"/>
-          <p:nvPr/>
-        </p:nvSpPr>
-        <p:spPr>
-          <a:xfrm>
-            <a:off x="8549640" y="2880360"/>
-            <a:ext cx="2743200" cy="1097280"/>
-          </a:xfrm>
-          <a:prstGeom prst="rect">
-            <a:avLst/>
-          </a:prstGeom>
-          <a:noFill/>
-        </p:spPr>
-        <p:txBody>
-          <a:bodyPr wrap="square" anchor="t">
-            <a:spAutoFit/>
-          </a:bodyPr>
-          <a:lstStyle/>
-          <a:p>
-            <a:pPr algn="l">
-              <a:lnSpc>
-                <a:spcPct val="105000"/>
-              </a:lnSpc>
-              <a:spcBef>
-                <a:spcPts val="0"/>
-              </a:spcBef>
-              <a:spcAft>
-                <a:spcPts val="200"/>
-              </a:spcAft>
-            </a:pPr>
-            <a:r>
-              <a:rPr sz="4000" b="1" i="0">
-                <a:solidFill>
-                  <a:srgbClr val="222222"/>
-                </a:solidFill>
-                <a:latin typeface="Calibri"/>
-              </a:rPr>
-              <a:t>$12</a:t>
-            </a:r>
-            <a:r>
-              <a:rPr sz="1600" b="1" i="0">
-                <a:solidFill>
-                  <a:srgbClr val="767676"/>
-                </a:solidFill>
-                <a:latin typeface="Calibri"/>
-              </a:rPr>
-              <a:t> / user</a:t>
-            </a:r>
-          </a:p>
-          <a:p>
-            <a:pPr algn="l">
-              <a:lnSpc>
-                <a:spcPct val="105000"/>
-              </a:lnSpc>
-              <a:spcBef>
-                <a:spcPts val="0"/>
-              </a:spcBef>
-              <a:spcAft>
-                <a:spcPts val="200"/>
-              </a:spcAft>
-            </a:pPr>
-            <a:r>
-              <a:rPr sz="1400" b="0" i="0">
-                <a:solidFill>
-                  <a:srgbClr val="767676"/>
-                </a:solidFill>
-                <a:latin typeface="Calibri"/>
-              </a:rPr>
-              <a:t>per month</a:t>
+              <a:t>Product</a:t>
             </a:r>
           </a:p>
         </p:txBody>
@@ -5887,8 +5909,8 @@
         </p:nvSpPr>
         <p:spPr>
           <a:xfrm>
-            <a:off x="8549640" y="3977639"/>
-            <a:ext cx="2743200" cy="1828800"/>
+            <a:off x="9005431" y="2474528"/>
+            <a:ext cx="2189136" cy="2719591"/>
           </a:xfrm>
           <a:prstGeom prst="rect">
             <a:avLst/>
@@ -5910,31 +5932,13 @@
               </a:spcAft>
             </a:pPr>
             <a:r>
-              <a:rPr sz="1300" b="1">
-                <a:solidFill>
-                  <a:srgbClr val="FF5A5F"/>
+              <a:rPr lang="en-US" sz="1300" b="1" dirty="0">
+                <a:solidFill>
+                  <a:srgbClr val="6B7BF7"/>
                 </a:solidFill>
                 <a:latin typeface="Calibri"/>
               </a:rPr>
-              <a:t>—  </a:t>
-            </a:r>
-            <a:r>
-              <a:rPr sz="1300" b="1">
-                <a:solidFill>
-                  <a:srgbClr val="222222"/>
-                </a:solidFill>
-                <a:latin typeface="Calibri"/>
-              </a:rPr>
-              <a:t>Free tier</a:t>
-            </a:r>
-            <a:r>
-              <a:rPr sz="1300" b="0">
-                <a:solidFill>
-                  <a:srgbClr val="767676"/>
-                </a:solidFill>
-                <a:latin typeface="Calibri"/>
-              </a:rPr>
-              <a:t>  1 integration, 3 projects.</a:t>
+              <a:t>Technologies Used:</a:t>
             </a:r>
           </a:p>
           <a:p>
@@ -5947,31 +5951,31 @@
               </a:spcAft>
             </a:pPr>
             <a:r>
-              <a:rPr sz="1300" b="1">
-                <a:solidFill>
-                  <a:srgbClr val="FF5A5F"/>
+              <a:rPr lang="en-US" sz="1300" b="1" dirty="0">
+                <a:solidFill>
+                  <a:srgbClr val="6B7BF7"/>
                 </a:solidFill>
                 <a:latin typeface="Calibri"/>
               </a:rPr>
               <a:t>—  </a:t>
             </a:r>
             <a:r>
-              <a:rPr sz="1300" b="1">
-                <a:solidFill>
-                  <a:srgbClr val="222222"/>
+              <a:rPr lang="en-US" sz="1300" b="1" dirty="0" err="1">
+                <a:solidFill>
+                  <a:srgbClr val="2F3545"/>
                 </a:solidFill>
                 <a:latin typeface="Calibri"/>
               </a:rPr>
-              <a:t>Pro</a:t>
-            </a:r>
-            <a:r>
-              <a:rPr sz="1300" b="0">
-                <a:solidFill>
-                  <a:srgbClr val="767676"/>
+              <a:t>Supabase</a:t>
+            </a:r>
+            <a:r>
+              <a:rPr lang="en-US" sz="1300" b="0" dirty="0">
+                <a:solidFill>
+                  <a:srgbClr val="6B7280"/>
                 </a:solidFill>
                 <a:latin typeface="Calibri"/>
               </a:rPr>
-              <a:t>  unlimited projects &amp; history.</a:t>
+              <a:t> data tables</a:t>
             </a:r>
           </a:p>
           <a:p>
@@ -5984,35 +5988,213 @@
               </a:spcAft>
             </a:pPr>
             <a:r>
-              <a:rPr sz="1300" b="1">
-                <a:solidFill>
-                  <a:srgbClr val="FF5A5F"/>
+              <a:rPr lang="en-US" sz="1300" b="1" dirty="0">
+                <a:solidFill>
+                  <a:srgbClr val="6B7BF7"/>
                 </a:solidFill>
                 <a:latin typeface="Calibri"/>
               </a:rPr>
               <a:t>—  </a:t>
             </a:r>
             <a:r>
-              <a:rPr sz="1300" b="1">
-                <a:solidFill>
-                  <a:srgbClr val="222222"/>
-                </a:solidFill>
+              <a:rPr lang="en-US" sz="1300" b="1" dirty="0">
                 <a:latin typeface="Calibri"/>
               </a:rPr>
-              <a:t>Teams</a:t>
-            </a:r>
-            <a:r>
-              <a:rPr sz="1300" b="0">
-                <a:solidFill>
-                  <a:srgbClr val="767676"/>
+              <a:t>Anthropic APIs </a:t>
+            </a:r>
+            <a:r>
+              <a:rPr lang="en-US" sz="1300" dirty="0">
+                <a:latin typeface="Times New Roman" panose="02020603050405020304" pitchFamily="18" charset="0"/>
+                <a:cs typeface="Times New Roman" panose="02020603050405020304" pitchFamily="18" charset="0"/>
+              </a:rPr>
+              <a:t>Claude</a:t>
+            </a:r>
+            <a:r>
+              <a:rPr lang="en-US" sz="1300" dirty="0">
+                <a:solidFill>
+                  <a:srgbClr val="6B7280"/>
+                </a:solidFill>
+                <a:latin typeface="Times New Roman" panose="02020603050405020304" pitchFamily="18" charset="0"/>
+                <a:cs typeface="Times New Roman" panose="02020603050405020304" pitchFamily="18" charset="0"/>
+              </a:rPr>
+              <a:t> </a:t>
+            </a:r>
+            <a:r>
+              <a:rPr lang="en-US" sz="1300" b="0" dirty="0">
+                <a:solidFill>
+                  <a:srgbClr val="6B7280"/>
+                </a:solidFill>
+                <a:latin typeface="Times New Roman" panose="02020603050405020304" pitchFamily="18" charset="0"/>
+                <a:cs typeface="Times New Roman" panose="02020603050405020304" pitchFamily="18" charset="0"/>
+              </a:rPr>
+              <a:t>Sonnet 5, Haiku 4.5</a:t>
+            </a:r>
+          </a:p>
+          <a:p>
+            <a:pPr>
+              <a:lnSpc>
+                <a:spcPct val="108000"/>
+              </a:lnSpc>
+              <a:spcAft>
+                <a:spcPts val="900"/>
+              </a:spcAft>
+            </a:pPr>
+            <a:r>
+              <a:rPr lang="en-US" sz="1300" b="1" dirty="0">
+                <a:solidFill>
+                  <a:srgbClr val="6B7BF7"/>
+                </a:solidFill>
+              </a:rPr>
+              <a:t>—  </a:t>
+            </a:r>
+            <a:r>
+              <a:rPr lang="en-US" sz="1300" b="1" dirty="0">
+                <a:solidFill>
+                  <a:srgbClr val="2F3545"/>
+                </a:solidFill>
+              </a:rPr>
+              <a:t>Anthropic Claude AI</a:t>
+            </a:r>
+            <a:endParaRPr lang="en-US" sz="1300" b="0" dirty="0">
+              <a:solidFill>
+                <a:srgbClr val="6B7280"/>
+              </a:solidFill>
+              <a:latin typeface="Times New Roman" panose="02020603050405020304" pitchFamily="18" charset="0"/>
+              <a:cs typeface="Times New Roman" panose="02020603050405020304" pitchFamily="18" charset="0"/>
+            </a:endParaRPr>
+          </a:p>
+          <a:p>
+            <a:pPr>
+              <a:lnSpc>
+                <a:spcPct val="108000"/>
+              </a:lnSpc>
+              <a:spcAft>
+                <a:spcPts val="900"/>
+              </a:spcAft>
+            </a:pPr>
+            <a:r>
+              <a:rPr lang="en-US" sz="1300" b="1" dirty="0">
+                <a:solidFill>
+                  <a:srgbClr val="6B7BF7"/>
                 </a:solidFill>
                 <a:latin typeface="Calibri"/>
               </a:rPr>
-              <a:t>  shared dashboards &amp; roles.</a:t>
-            </a:r>
-          </a:p>
-        </p:txBody>
-      </p:sp>
+              <a:t>—  </a:t>
+            </a:r>
+            <a:r>
+              <a:rPr lang="en-US" sz="1300" b="1" dirty="0">
+                <a:solidFill>
+                  <a:srgbClr val="2F3545"/>
+                </a:solidFill>
+                <a:latin typeface="Calibri"/>
+              </a:rPr>
+              <a:t>Google Cloud Platform </a:t>
+            </a:r>
+            <a:r>
+              <a:rPr lang="en-US" sz="1300" b="0" dirty="0">
+                <a:solidFill>
+                  <a:srgbClr val="6B7280"/>
+                </a:solidFill>
+                <a:latin typeface="Calibri"/>
+              </a:rPr>
+              <a:t>Gmail + Calendar </a:t>
+            </a:r>
+            <a:r>
+              <a:rPr lang="en-US" sz="1300" dirty="0">
+                <a:solidFill>
+                  <a:srgbClr val="6B7280"/>
+                </a:solidFill>
+                <a:latin typeface="Calibri"/>
+              </a:rPr>
+              <a:t>API</a:t>
+            </a:r>
+          </a:p>
+          <a:p>
+            <a:pPr>
+              <a:lnSpc>
+                <a:spcPct val="108000"/>
+              </a:lnSpc>
+              <a:spcAft>
+                <a:spcPts val="900"/>
+              </a:spcAft>
+            </a:pPr>
+            <a:r>
+              <a:rPr lang="en-US" sz="1300" b="1" dirty="0">
+                <a:solidFill>
+                  <a:srgbClr val="6B7BF7"/>
+                </a:solidFill>
+              </a:rPr>
+              <a:t>— </a:t>
+            </a:r>
+            <a:r>
+              <a:rPr lang="en-US" sz="1300" b="1" dirty="0">
+                <a:solidFill>
+                  <a:srgbClr val="2F3545"/>
+                </a:solidFill>
+                <a:latin typeface="Calibri"/>
+              </a:rPr>
+              <a:t>Python</a:t>
+            </a:r>
+          </a:p>
+          <a:p>
+            <a:pPr>
+              <a:lnSpc>
+                <a:spcPct val="108000"/>
+              </a:lnSpc>
+              <a:spcAft>
+                <a:spcPts val="900"/>
+              </a:spcAft>
+            </a:pPr>
+            <a:r>
+              <a:rPr lang="en-US" sz="1300" b="1" dirty="0">
+                <a:solidFill>
+                  <a:srgbClr val="6B7BF7"/>
+                </a:solidFill>
+              </a:rPr>
+              <a:t>— </a:t>
+            </a:r>
+            <a:r>
+              <a:rPr lang="en-US" sz="1300" b="1" dirty="0">
+                <a:solidFill>
+                  <a:srgbClr val="2F3545"/>
+                </a:solidFill>
+                <a:latin typeface="Calibri"/>
+              </a:rPr>
+              <a:t>HTML, CSS, JavaScript</a:t>
+            </a:r>
+          </a:p>
+        </p:txBody>
+      </p:sp>
+      <p:pic>
+        <p:nvPicPr>
+          <p:cNvPr id="21" name="Picture 20">
+            <a:extLst>
+              <a:ext uri="{FF2B5EF4-FFF2-40B4-BE49-F238E27FC236}">
+                <a16:creationId xmlns:a16="http://schemas.microsoft.com/office/drawing/2014/main" id="{ADAEA1E1-B432-0216-956D-936C15F878AA}"/>
+              </a:ext>
+            </a:extLst>
+          </p:cNvPr>
+          <p:cNvPicPr>
+            <a:picLocks noChangeAspect="1"/>
+          </p:cNvPicPr>
+          <p:nvPr/>
+        </p:nvPicPr>
+        <p:blipFill>
+          <a:blip r:embed="rId2"/>
+          <a:stretch>
+            <a:fillRect/>
+          </a:stretch>
+        </p:blipFill>
+        <p:spPr>
+          <a:xfrm>
+            <a:off x="411480" y="1594333"/>
+            <a:ext cx="7772400" cy="4367555"/>
+          </a:xfrm>
+          <a:prstGeom prst="rect">
+            <a:avLst/>
+          </a:prstGeom>
+        </p:spPr>
+      </p:pic>
     </p:spTree>
   </p:cSld>
   <p:clrMapOvr>
@@ -6021,14 +6203,25 @@
 </p:sld>
 </file>
 
-<file path=ppt/slides/slide5.xml><?xml version="1.0" encoding="utf-8"?>
+<file path=ppt/slides/slide6.xml><?xml version="1.0" encoding="utf-8"?>
 <p:sld xmlns:a="http://schemas.openxmlformats.org/drawingml/2006/main" xmlns:r="http://schemas.openxmlformats.org/officeDocument/2006/relationships" xmlns:p="http://schemas.openxmlformats.org/presentationml/2006/main">
   <p:cSld>
     <p:bg>
       <p:bgPr>
-        <a:solidFill>
-          <a:srgbClr val="222222"/>
-        </a:solidFill>
+        <a:gradFill rotWithShape="1">
+          <a:gsLst>
+            <a:gs pos="0">
+              <a:srgbClr val="FFFFFF"/>
+            </a:gs>
+            <a:gs pos="55000">
+              <a:srgbClr val="F6F7FE"/>
+            </a:gs>
+            <a:gs pos="100000">
+              <a:srgbClr val="E8EBFC"/>
+            </a:gs>
+          </a:gsLst>
+          <a:lin ang="2700000" scaled="0"/>
+        </a:gradFill>
         <a:effectLst/>
       </p:bgPr>
     </p:bg>
@@ -6048,14 +6241,107 @@
       </p:grpSpPr>
       <p:sp>
         <p:nvSpPr>
-          <p:cNvPr id="2" name="TextBox 1"/>
+          <p:cNvPr id="30" name="Accent Blob 1"/>
+          <p:cNvSpPr/>
+          <p:nvPr/>
+        </p:nvSpPr>
+        <p:spPr>
+          <a:xfrm>
+            <a:off x="9550000" y="-1250000"/>
+            <a:ext cx="4200000" cy="4200000"/>
+          </a:xfrm>
+          <a:prstGeom prst="ellipse">
+            <a:avLst/>
+          </a:prstGeom>
+          <a:solidFill>
+            <a:srgbClr val="6B7BF7">
+              <a:alpha val="10000"/>
+            </a:srgbClr>
+          </a:solidFill>
+          <a:ln>
+            <a:noFill/>
+          </a:ln>
+        </p:spPr>
+        <p:txBody>
+          <a:bodyPr/>
+          <a:lstStyle/>
+          <a:p>
+            <a:endParaRPr lang="en-US"/>
+          </a:p>
+        </p:txBody>
+      </p:sp>
+      <p:sp>
+        <p:nvSpPr>
+          <p:cNvPr id="31" name="Accent Blob 2"/>
+          <p:cNvSpPr/>
+          <p:nvPr/>
+        </p:nvSpPr>
+        <p:spPr>
+          <a:xfrm>
+            <a:off x="-1400000" y="4300000"/>
+            <a:ext cx="3600000" cy="3600000"/>
+          </a:xfrm>
+          <a:prstGeom prst="ellipse">
+            <a:avLst/>
+          </a:prstGeom>
+          <a:solidFill>
+            <a:srgbClr val="6B7BF7">
+              <a:alpha val="8000"/>
+            </a:srgbClr>
+          </a:solidFill>
+          <a:ln>
+            <a:noFill/>
+          </a:ln>
+        </p:spPr>
+        <p:txBody>
+          <a:bodyPr/>
+          <a:lstStyle/>
+          <a:p>
+            <a:endParaRPr lang="en-US"/>
+          </a:p>
+        </p:txBody>
+      </p:sp>
+      <p:sp>
+        <p:nvSpPr>
+          <p:cNvPr id="32" name="Accent Rule"/>
+          <p:cNvSpPr/>
+          <p:nvPr/>
+        </p:nvSpPr>
+        <p:spPr>
+          <a:xfrm>
+            <a:off x="5638800" y="4480560"/>
+            <a:ext cx="914400" cy="45720"/>
+          </a:xfrm>
+          <a:prstGeom prst="roundRect">
+            <a:avLst>
+              <a:gd name="adj" fmla="val 50000"/>
+            </a:avLst>
+          </a:prstGeom>
+          <a:solidFill>
+            <a:srgbClr val="6B7BF7"/>
+          </a:solidFill>
+          <a:ln>
+            <a:noFill/>
+          </a:ln>
+        </p:spPr>
+        <p:txBody>
+          <a:bodyPr/>
+          <a:lstStyle/>
+          <a:p>
+            <a:endParaRPr lang="en-US"/>
+          </a:p>
+        </p:txBody>
+      </p:sp>
+      <p:sp>
+        <p:nvSpPr>
+          <p:cNvPr id="7" name="TextBox 6"/>
           <p:cNvSpPr txBox="1"/>
           <p:nvPr/>
         </p:nvSpPr>
         <p:spPr>
           <a:xfrm>
-            <a:off x="640080" y="548640"/>
-            <a:ext cx="3657600" cy="365760"/>
+            <a:off x="2758440" y="4640580"/>
+            <a:ext cx="6675120" cy="865943"/>
           </a:xfrm>
           <a:prstGeom prst="rect">
             <a:avLst/>
@@ -6068,9 +6354,9 @@
           </a:bodyPr>
           <a:lstStyle/>
           <a:p>
-            <a:pPr algn="l">
+            <a:pPr algn="ctr">
               <a:lnSpc>
-                <a:spcPct val="105000"/>
+                <a:spcPct val="125000"/>
               </a:lnSpc>
               <a:spcBef>
                 <a:spcPts val="0"/>
@@ -6080,27 +6366,35 @@
               </a:spcAft>
             </a:pPr>
             <a:r>
-              <a:rPr sz="1300" b="1" i="0">
-                <a:solidFill>
-                  <a:srgbClr val="FF5A5F"/>
-                </a:solidFill>
-                <a:latin typeface="Calibri"/>
+              <a:rPr lang="en-US" sz="2000">
+                <a:solidFill>
+                  <a:srgbClr val="6B7BF7"/>
+                </a:solidFill>
+                <a:latin typeface="Segoe UI Semilight" pitchFamily="34" charset="0"/>
+                <a:cs typeface="Segoe UI Semilight" pitchFamily="34" charset="0"/>
               </a:rPr>
-              <a:t>WHY WE WIN + THE ASK</a:t>
-            </a:r>
-          </a:p>
-        </p:txBody>
-      </p:sp>
-      <p:sp>
-        <p:nvSpPr>
-          <p:cNvPr id="3" name="TextBox 2"/>
+              <a:t>Any questions?</a:t>
+            </a:r>
+            <a:endParaRPr lang="en-US" sz="2400" b="0" i="0">
+              <a:solidFill>
+                <a:srgbClr val="6B7BF7"/>
+              </a:solidFill>
+              <a:latin typeface="Segoe UI Semilight" pitchFamily="34" charset="0"/>
+              <a:cs typeface="Segoe UI Semilight" pitchFamily="34" charset="0"/>
+            </a:endParaRPr>
+          </a:p>
+        </p:txBody>
+      </p:sp>
+      <p:sp>
+        <p:nvSpPr>
+          <p:cNvPr id="8" name="TextBox 7"/>
           <p:cNvSpPr txBox="1"/>
           <p:nvPr/>
         </p:nvSpPr>
         <p:spPr>
           <a:xfrm>
-            <a:off x="640080" y="914400"/>
-            <a:ext cx="10972800" cy="1097280"/>
+            <a:off x="2895600" y="5867400"/>
+            <a:ext cx="6400800" cy="261738"/>
           </a:xfrm>
           <a:prstGeom prst="rect">
             <a:avLst/>
@@ -6113,39 +6407,60 @@
           </a:bodyPr>
           <a:lstStyle/>
           <a:p>
-            <a:pPr algn="l">
+            <a:pPr algn="ctr">
               <a:lnSpc>
                 <a:spcPct val="105000"/>
               </a:lnSpc>
-              <a:spcBef>
-                <a:spcPts val="0"/>
-              </a:spcBef>
               <a:spcAft>
                 <a:spcPts val="600"/>
               </a:spcAft>
             </a:pPr>
             <a:r>
-              <a:rPr sz="3000" b="1" i="0">
-                <a:solidFill>
-                  <a:srgbClr val="FFFFFF"/>
-                </a:solidFill>
-                <a:latin typeface="Calibri"/>
+              <a:rPr lang="en-US" sz="1100" b="0" i="0" dirty="0">
+                <a:solidFill>
+                  <a:srgbClr val="9AA0AE"/>
+                </a:solidFill>
+                <a:latin typeface="Segoe UI" pitchFamily="34" charset="0"/>
               </a:rPr>
-              <a:t>Not another inbox. A project manager that remembers.</a:t>
-            </a:r>
-          </a:p>
-        </p:txBody>
-      </p:sp>
-      <p:sp>
-        <p:nvSpPr>
-          <p:cNvPr id="4" name="TextBox 3"/>
+              <a:t>Crystal Xu  ·  </a:t>
+            </a:r>
+            <a:r>
+              <a:rPr lang="en-US" sz="1100" b="0" i="0" dirty="0" err="1">
+                <a:solidFill>
+                  <a:srgbClr val="9AA0AE"/>
+                </a:solidFill>
+                <a:latin typeface="Segoe UI" pitchFamily="34" charset="0"/>
+              </a:rPr>
+              <a:t>ThreadLinePMA</a:t>
+            </a:r>
+            <a:r>
+              <a:rPr lang="en-US" sz="1100" b="0" i="0" dirty="0">
+                <a:solidFill>
+                  <a:srgbClr val="9AA0AE"/>
+                </a:solidFill>
+                <a:latin typeface="Segoe UI" pitchFamily="34" charset="0"/>
+              </a:rPr>
+              <a:t>  ·  2026</a:t>
+            </a:r>
+          </a:p>
+        </p:txBody>
+      </p:sp>
+      <p:sp>
+        <p:nvSpPr>
+          <p:cNvPr id="10" name="TextBox 9">
+            <a:extLst>
+              <a:ext uri="{FF2B5EF4-FFF2-40B4-BE49-F238E27FC236}">
+                <a16:creationId xmlns:a16="http://schemas.microsoft.com/office/drawing/2014/main" id="{E9EA8E3E-1D6F-4DAB-800F-5A38B243D20D}"/>
+              </a:ext>
+            </a:extLst>
+          </p:cNvPr>
           <p:cNvSpPr txBox="1"/>
           <p:nvPr/>
         </p:nvSpPr>
         <p:spPr>
           <a:xfrm>
-            <a:off x="640080" y="2194560"/>
-            <a:ext cx="6035040" cy="3657600"/>
+            <a:off x="2286000" y="2217420"/>
+            <a:ext cx="7620000" cy="954107"/>
           </a:xfrm>
           <a:prstGeom prst="rect">
             <a:avLst/>
@@ -6153,452 +6468,26 @@
           <a:noFill/>
         </p:spPr>
         <p:txBody>
-          <a:bodyPr wrap="square">
+          <a:bodyPr wrap="square" rtlCol="0">
             <a:spAutoFit/>
           </a:bodyPr>
           <a:lstStyle/>
           <a:p>
-            <a:pPr>
-              <a:lnSpc>
-                <a:spcPct val="110000"/>
-              </a:lnSpc>
-              <a:spcAft>
-                <a:spcPts val="1600"/>
-              </a:spcAft>
-            </a:pPr>
-            <a:r>
-              <a:rPr sz="1700" b="1">
-                <a:solidFill>
-                  <a:srgbClr val="FF5A5F"/>
-                </a:solidFill>
-                <a:latin typeface="Calibri"/>
+            <a:pPr algn="ctr"/>
+            <a:r>
+              <a:rPr lang="en-US" sz="4000" b="0" i="0" dirty="0">
+                <a:solidFill>
+                  <a:srgbClr val="2F3545"/>
+                </a:solidFill>
+                <a:latin typeface="Segoe UI Semilight" pitchFamily="34" charset="0"/>
+                <a:cs typeface="Segoe UI Semilight" pitchFamily="34" charset="0"/>
               </a:rPr>
-              <a:t>→  </a:t>
-            </a:r>
-            <a:r>
-              <a:rPr sz="1700" b="1">
-                <a:solidFill>
-                  <a:srgbClr val="FFFFFF"/>
-                </a:solidFill>
-                <a:latin typeface="Calibri"/>
-              </a:rPr>
-              <a:t>Meaning, not keywords
-</a:t>
-            </a:r>
-            <a:r>
-              <a:rPr sz="1400" b="0">
-                <a:solidFill>
-                  <a:srgbClr val="BBBBBB"/>
-                </a:solidFill>
-                <a:latin typeface="Calibri"/>
-              </a:rPr>
-              <a:t>     semantic grouping across tools, not just search.</a:t>
-            </a:r>
-          </a:p>
-          <a:p>
-            <a:pPr>
-              <a:lnSpc>
-                <a:spcPct val="110000"/>
-              </a:lnSpc>
-              <a:spcAft>
-                <a:spcPts val="1600"/>
-              </a:spcAft>
-            </a:pPr>
-            <a:r>
-              <a:rPr sz="1700" b="1">
-                <a:solidFill>
-                  <a:srgbClr val="FF5A5F"/>
-                </a:solidFill>
-                <a:latin typeface="Calibri"/>
-              </a:rPr>
-              <a:t>→  </a:t>
-            </a:r>
-            <a:r>
-              <a:rPr sz="1700" b="1">
-                <a:solidFill>
-                  <a:srgbClr val="FFFFFF"/>
-                </a:solidFill>
-                <a:latin typeface="Calibri"/>
-              </a:rPr>
-              <a:t>Doesn't replace your inbox
-</a:t>
-            </a:r>
-            <a:r>
-              <a:rPr sz="1400" b="0">
-                <a:solidFill>
-                  <a:srgbClr val="BBBBBB"/>
-                </a:solidFill>
-                <a:latin typeface="Calibri"/>
-              </a:rPr>
-              <a:t>     it organizes above your existing apps.</a:t>
-            </a:r>
-          </a:p>
-          <a:p>
-            <a:pPr>
-              <a:lnSpc>
-                <a:spcPct val="110000"/>
-              </a:lnSpc>
-              <a:spcAft>
-                <a:spcPts val="1600"/>
-              </a:spcAft>
-            </a:pPr>
-            <a:r>
-              <a:rPr sz="1700" b="1">
-                <a:solidFill>
-                  <a:srgbClr val="FF5A5F"/>
-                </a:solidFill>
-                <a:latin typeface="Calibri"/>
-              </a:rPr>
-              <a:t>→  </a:t>
-            </a:r>
-            <a:r>
-              <a:rPr sz="1700" b="1">
-                <a:solidFill>
-                  <a:srgbClr val="FFFFFF"/>
-                </a:solidFill>
-                <a:latin typeface="Calibri"/>
-              </a:rPr>
-              <a:t>Source-linked trust
-</a:t>
-            </a:r>
-            <a:r>
-              <a:rPr sz="1400" b="0">
-                <a:solidFill>
-                  <a:srgbClr val="BBBBBB"/>
-                </a:solidFill>
-                <a:latin typeface="Calibri"/>
-              </a:rPr>
-              <a:t>     every conclusion is verifiable and editable.</a:t>
-            </a:r>
-          </a:p>
-          <a:p>
-            <a:pPr>
-              <a:lnSpc>
-                <a:spcPct val="110000"/>
-              </a:lnSpc>
-              <a:spcAft>
-                <a:spcPts val="1600"/>
-              </a:spcAft>
-            </a:pPr>
-            <a:r>
-              <a:rPr sz="1700" b="1">
-                <a:solidFill>
-                  <a:srgbClr val="FF5A5F"/>
-                </a:solidFill>
-                <a:latin typeface="Calibri"/>
-              </a:rPr>
-              <a:t>→  </a:t>
-            </a:r>
-            <a:r>
-              <a:rPr sz="1700" b="1">
-                <a:solidFill>
-                  <a:srgbClr val="FFFFFF"/>
-                </a:solidFill>
-                <a:latin typeface="Calibri"/>
-              </a:rPr>
-              <a:t>Fast to value
-</a:t>
-            </a:r>
-            <a:r>
-              <a:rPr sz="1400" b="0">
-                <a:solidFill>
-                  <a:srgbClr val="BBBBBB"/>
-                </a:solidFill>
-                <a:latin typeface="Calibri"/>
-              </a:rPr>
-              <a:t>     connect one account and see projects in minutes.</a:t>
-            </a:r>
-          </a:p>
-        </p:txBody>
-      </p:sp>
-      <p:sp>
-        <p:nvSpPr>
-          <p:cNvPr id="5" name="Rectangle 4"/>
-          <p:cNvSpPr/>
-          <p:nvPr/>
-        </p:nvSpPr>
-        <p:spPr>
-          <a:xfrm>
-            <a:off x="7040880" y="2194560"/>
-            <a:ext cx="4480560" cy="3749039"/>
-          </a:xfrm>
-          <a:prstGeom prst="rect">
-            <a:avLst/>
-          </a:prstGeom>
-          <a:solidFill>
-            <a:srgbClr val="FF5A5F"/>
-          </a:solidFill>
-          <a:ln>
-            <a:noFill/>
-          </a:ln>
-          <a:effectLst/>
-        </p:spPr>
-        <p:style>
-          <a:lnRef idx="1">
-            <a:schemeClr val="accent1"/>
-          </a:lnRef>
-          <a:fillRef idx="3">
-            <a:schemeClr val="accent1"/>
-          </a:fillRef>
-          <a:effectRef idx="2">
-            <a:schemeClr val="accent1"/>
-          </a:effectRef>
-          <a:fontRef idx="minor">
-            <a:schemeClr val="lt1"/>
-          </a:fontRef>
-        </p:style>
-        <p:txBody>
-          <a:bodyPr rtlCol="0" anchor="ctr"/>
-          <a:lstStyle/>
-          <a:p>
-            <a:pPr algn="ctr"/>
-            <a:endParaRPr/>
-          </a:p>
-        </p:txBody>
-      </p:sp>
-      <p:sp>
-        <p:nvSpPr>
-          <p:cNvPr id="6" name="TextBox 5"/>
-          <p:cNvSpPr txBox="1"/>
-          <p:nvPr/>
-        </p:nvSpPr>
-        <p:spPr>
-          <a:xfrm>
-            <a:off x="7406640" y="2468880"/>
-            <a:ext cx="3840480" cy="457200"/>
-          </a:xfrm>
-          <a:prstGeom prst="rect">
-            <a:avLst/>
-          </a:prstGeom>
-          <a:noFill/>
-        </p:spPr>
-        <p:txBody>
-          <a:bodyPr wrap="square" anchor="t">
-            <a:spAutoFit/>
-          </a:bodyPr>
-          <a:lstStyle/>
-          <a:p>
-            <a:pPr algn="l">
-              <a:lnSpc>
-                <a:spcPct val="105000"/>
-              </a:lnSpc>
-              <a:spcBef>
-                <a:spcPts val="0"/>
-              </a:spcBef>
-              <a:spcAft>
-                <a:spcPts val="600"/>
-              </a:spcAft>
-            </a:pPr>
-            <a:r>
-              <a:rPr sz="1400" b="1" i="0">
-                <a:solidFill>
-                  <a:srgbClr val="FFFFFF"/>
-                </a:solidFill>
-                <a:latin typeface="Calibri"/>
-              </a:rPr>
-              <a:t>THE ASK</a:t>
-            </a:r>
-          </a:p>
-        </p:txBody>
-      </p:sp>
-      <p:sp>
-        <p:nvSpPr>
-          <p:cNvPr id="7" name="TextBox 6"/>
-          <p:cNvSpPr txBox="1"/>
-          <p:nvPr/>
-        </p:nvSpPr>
-        <p:spPr>
-          <a:xfrm>
-            <a:off x="7406640" y="2926080"/>
-            <a:ext cx="3840480" cy="914400"/>
-          </a:xfrm>
-          <a:prstGeom prst="rect">
-            <a:avLst/>
-          </a:prstGeom>
-          <a:noFill/>
-        </p:spPr>
-        <p:txBody>
-          <a:bodyPr wrap="square" anchor="t">
-            <a:spAutoFit/>
-          </a:bodyPr>
-          <a:lstStyle/>
-          <a:p>
-            <a:pPr algn="l">
-              <a:lnSpc>
-                <a:spcPct val="105000"/>
-              </a:lnSpc>
-              <a:spcBef>
-                <a:spcPts val="0"/>
-              </a:spcBef>
-              <a:spcAft>
-                <a:spcPts val="400"/>
-              </a:spcAft>
-            </a:pPr>
-            <a:r>
-              <a:rPr sz="4400" b="1" i="0">
-                <a:solidFill>
-                  <a:srgbClr val="FFFFFF"/>
-                </a:solidFill>
-                <a:latin typeface="Calibri"/>
-              </a:rPr>
-              <a:t>$500K</a:t>
-            </a:r>
-          </a:p>
-          <a:p>
-            <a:pPr algn="l">
-              <a:lnSpc>
-                <a:spcPct val="105000"/>
-              </a:lnSpc>
-              <a:spcBef>
-                <a:spcPts val="0"/>
-              </a:spcBef>
-              <a:spcAft>
-                <a:spcPts val="400"/>
-              </a:spcAft>
-            </a:pPr>
-            <a:r>
-              <a:rPr sz="1500" b="0" i="0">
-                <a:solidFill>
-                  <a:srgbClr val="FFFFFF"/>
-                </a:solidFill>
-                <a:latin typeface="Calibri"/>
-              </a:rPr>
-              <a:t>to fund 12 months of runway</a:t>
-            </a:r>
-          </a:p>
-        </p:txBody>
-      </p:sp>
-      <p:sp>
-        <p:nvSpPr>
-          <p:cNvPr id="8" name="TextBox 7"/>
-          <p:cNvSpPr txBox="1"/>
-          <p:nvPr/>
-        </p:nvSpPr>
-        <p:spPr>
-          <a:xfrm>
-            <a:off x="7406640" y="4297680"/>
-            <a:ext cx="3840480" cy="1645920"/>
-          </a:xfrm>
-          <a:prstGeom prst="rect">
-            <a:avLst/>
-          </a:prstGeom>
-          <a:noFill/>
-        </p:spPr>
-        <p:txBody>
-          <a:bodyPr wrap="square">
-            <a:spAutoFit/>
-          </a:bodyPr>
-          <a:lstStyle/>
-          <a:p>
-            <a:pPr>
-              <a:lnSpc>
-                <a:spcPct val="108000"/>
-              </a:lnSpc>
-              <a:spcAft>
-                <a:spcPts val="1000"/>
-              </a:spcAft>
-            </a:pPr>
-            <a:r>
-              <a:rPr sz="1400" b="1">
-                <a:solidFill>
-                  <a:srgbClr val="FFFFFF"/>
-                </a:solidFill>
-                <a:latin typeface="Calibri"/>
-              </a:rPr>
-              <a:t>—  </a:t>
-            </a:r>
-            <a:r>
-              <a:rPr sz="1400" b="1">
-                <a:solidFill>
-                  <a:srgbClr val="222222"/>
-                </a:solidFill>
-                <a:latin typeface="Calibri"/>
-              </a:rPr>
-              <a:t>Ship the MVP</a:t>
-            </a:r>
-            <a:r>
-              <a:rPr sz="1400" b="0">
-                <a:solidFill>
-                  <a:srgbClr val="767676"/>
-                </a:solidFill>
-                <a:latin typeface="Calibri"/>
-              </a:rPr>
-              <a:t>  Gmail + Calendar + file upload.</a:t>
-            </a:r>
-          </a:p>
-          <a:p>
-            <a:pPr>
-              <a:lnSpc>
-                <a:spcPct val="108000"/>
-              </a:lnSpc>
-              <a:spcAft>
-                <a:spcPts val="1000"/>
-              </a:spcAft>
-            </a:pPr>
-            <a:r>
-              <a:rPr sz="1400" b="1">
-                <a:solidFill>
-                  <a:srgbClr val="FFFFFF"/>
-                </a:solidFill>
-                <a:latin typeface="Calibri"/>
-              </a:rPr>
-              <a:t>—  </a:t>
-            </a:r>
-            <a:r>
-              <a:rPr sz="1400" b="1">
-                <a:solidFill>
-                  <a:srgbClr val="222222"/>
-                </a:solidFill>
-                <a:latin typeface="Calibri"/>
-              </a:rPr>
-              <a:t>First 500 users</a:t>
-            </a:r>
-            <a:r>
-              <a:rPr sz="1400" b="0">
-                <a:solidFill>
-                  <a:srgbClr val="767676"/>
-                </a:solidFill>
-                <a:latin typeface="Calibri"/>
-              </a:rPr>
-              <a:t>  PMs, consultants, freelancers.</a:t>
-            </a:r>
-          </a:p>
-          <a:p>
-            <a:pPr>
-              <a:lnSpc>
-                <a:spcPct val="108000"/>
-              </a:lnSpc>
-              <a:spcAft>
-                <a:spcPts val="1000"/>
-              </a:spcAft>
-            </a:pPr>
-            <a:r>
-              <a:rPr sz="1400" b="1">
-                <a:solidFill>
-                  <a:srgbClr val="FFFFFF"/>
-                </a:solidFill>
-                <a:latin typeface="Calibri"/>
-              </a:rPr>
-              <a:t>—  </a:t>
-            </a:r>
-            <a:r>
-              <a:rPr sz="1400" b="1">
-                <a:solidFill>
-                  <a:srgbClr val="222222"/>
-                </a:solidFill>
-                <a:latin typeface="Calibri"/>
-              </a:rPr>
-              <a:t>Prove accuracy</a:t>
-            </a:r>
-            <a:r>
-              <a:rPr sz="1400" b="0">
-                <a:solidFill>
-                  <a:srgbClr val="767676"/>
-                </a:solidFill>
-                <a:latin typeface="Calibri"/>
-              </a:rPr>
-              <a:t>  grouping quality users trust.</a:t>
-            </a:r>
+              <a:t>Thank you for listening</a:t>
+            </a:r>
+            <a:endParaRPr lang="en-US" sz="2000" b="1" dirty="0">
+              <a:latin typeface="Segoe UI Semilight" pitchFamily="34" charset="0"/>
+              <a:cs typeface="Segoe UI Semilight" pitchFamily="34" charset="0"/>
+            </a:endParaRPr>
           </a:p>
         </p:txBody>
       </p:sp>
